--- a/public/lessons/year-6-maths/spring/week-14/divide-non-unit-fractions/teaching-powerpoint-v1.pptx
+++ b/public/lessons/year-6-maths/spring/week-14/divide-non-unit-fractions/teaching-powerpoint-v1.pptx
@@ -2,24 +2,24 @@
 <file path=ppt/presentation.xml><?xml version="1.0" encoding="utf-8"?>
 <p:presentation xmlns:p="http://schemas.openxmlformats.org/presentationml/2006/main">
   <p:sldMasterIdLst>
-    <p:sldMasterId xmlns:r="http://schemas.openxmlformats.org/officeDocument/2006/relationships" id="2147483648" r:id="R2dcfce28956a4f0a"/>
+    <p:sldMasterId xmlns:r="http://schemas.openxmlformats.org/officeDocument/2006/relationships" id="2147483648" r:id="R1f7b028b45164897"/>
   </p:sldMasterIdLst>
   <p:notesMasterIdLst>
-    <p:notesMasterId xmlns:r="http://schemas.openxmlformats.org/officeDocument/2006/relationships" r:id="Rae5c269db9db49b6"/>
+    <p:notesMasterId xmlns:r="http://schemas.openxmlformats.org/officeDocument/2006/relationships" r:id="R7d723a69aedb4caa"/>
   </p:notesMasterIdLst>
   <p:sldIdLst>
-    <p:sldId xmlns:r="http://schemas.openxmlformats.org/officeDocument/2006/relationships" id="256" r:id="R8a2e991ea07c4646"/>
-    <p:sldId xmlns:r="http://schemas.openxmlformats.org/officeDocument/2006/relationships" id="257" r:id="Rc5dcedfb6df2442f"/>
-    <p:sldId xmlns:r="http://schemas.openxmlformats.org/officeDocument/2006/relationships" id="258" r:id="R49db60ab0b8d4a75"/>
-    <p:sldId xmlns:r="http://schemas.openxmlformats.org/officeDocument/2006/relationships" id="259" r:id="R2de729665e90486c"/>
-    <p:sldId xmlns:r="http://schemas.openxmlformats.org/officeDocument/2006/relationships" id="260" r:id="Rc651308b53ca4fcb"/>
-    <p:sldId xmlns:r="http://schemas.openxmlformats.org/officeDocument/2006/relationships" id="261" r:id="Rad4d2aadaed94040"/>
-    <p:sldId xmlns:r="http://schemas.openxmlformats.org/officeDocument/2006/relationships" id="262" r:id="Rbceb413678234585"/>
-    <p:sldId xmlns:r="http://schemas.openxmlformats.org/officeDocument/2006/relationships" id="263" r:id="R82e1658b2e874f17"/>
-    <p:sldId xmlns:r="http://schemas.openxmlformats.org/officeDocument/2006/relationships" id="264" r:id="R82a3ee2dc4dd4068"/>
-    <p:sldId xmlns:r="http://schemas.openxmlformats.org/officeDocument/2006/relationships" id="265" r:id="Rd2c19ccef44549f1"/>
-    <p:sldId xmlns:r="http://schemas.openxmlformats.org/officeDocument/2006/relationships" id="266" r:id="R15f99f6956bd455d"/>
-    <p:sldId xmlns:r="http://schemas.openxmlformats.org/officeDocument/2006/relationships" id="267" r:id="Rf1f917f4ef8541c1"/>
+    <p:sldId xmlns:r="http://schemas.openxmlformats.org/officeDocument/2006/relationships" id="256" r:id="Raaa602c4d97b4bf0"/>
+    <p:sldId xmlns:r="http://schemas.openxmlformats.org/officeDocument/2006/relationships" id="257" r:id="R8ed0dd58cf2e42ee"/>
+    <p:sldId xmlns:r="http://schemas.openxmlformats.org/officeDocument/2006/relationships" id="258" r:id="R8c77b782fe324586"/>
+    <p:sldId xmlns:r="http://schemas.openxmlformats.org/officeDocument/2006/relationships" id="259" r:id="Rbb8e48d15f3c4f91"/>
+    <p:sldId xmlns:r="http://schemas.openxmlformats.org/officeDocument/2006/relationships" id="260" r:id="R0c9ce30b42f54fa3"/>
+    <p:sldId xmlns:r="http://schemas.openxmlformats.org/officeDocument/2006/relationships" id="261" r:id="R1cad4f136f0748dd"/>
+    <p:sldId xmlns:r="http://schemas.openxmlformats.org/officeDocument/2006/relationships" id="262" r:id="R84f72918582642a8"/>
+    <p:sldId xmlns:r="http://schemas.openxmlformats.org/officeDocument/2006/relationships" id="263" r:id="R08b9fc5b15804d87"/>
+    <p:sldId xmlns:r="http://schemas.openxmlformats.org/officeDocument/2006/relationships" id="264" r:id="Rbf422d3318e4489f"/>
+    <p:sldId xmlns:r="http://schemas.openxmlformats.org/officeDocument/2006/relationships" id="265" r:id="R4d73babbb713463e"/>
+    <p:sldId xmlns:r="http://schemas.openxmlformats.org/officeDocument/2006/relationships" id="266" r:id="R8c7d9774536e455a"/>
+    <p:sldId xmlns:r="http://schemas.openxmlformats.org/officeDocument/2006/relationships" id="267" r:id="Ra5287770ed4346f5"/>
   </p:sldIdLst>
   <p:sldSz cx="12192000" cy="6858000"/>
   <p:notesSz cx="6858000" cy="9144000"/>
@@ -873,7 +873,7 @@
           <a:lstStyle xmlns:a="http://schemas.openxmlformats.org/drawingml/2006/main"/>
           <a:p xmlns:a="http://schemas.openxmlformats.org/drawingml/2006/main">
             <a:r>
-              <a:t>I do. Reveal the question, setup and each calculation stage one click at a time. Pupils watch before copying. Model answer: 3/8.</a:t>
+              <a:t>I do. Reveal the question, then reveal each mathematical change one click at a time. Point to the numbers and operation that changed before moving to the next line. Final answer: 3/8.</a:t>
             </a:r>
           </a:p>
         </p:txBody>
@@ -1291,7 +1291,7 @@
   </p:cSld>
   <p:clrMap bg1="lt1" tx1="dk1" bg2="lt2" tx2="dk2" accent1="accent1" accent2="accent2" accent3="accent3" accent4="accent4" accent5="accent5" accent6="accent6" hlink="hlink" folHlink="folHlink"/>
   <p:sldLayoutIdLst>
-    <p:sldLayoutId xmlns:r="http://schemas.openxmlformats.org/officeDocument/2006/relationships" id="2147483649" r:id="Rfe6de1c3597e493f"/>
+    <p:sldLayoutId xmlns:r="http://schemas.openxmlformats.org/officeDocument/2006/relationships" id="2147483649" r:id="R834f0c2ff46a4fb7"/>
   </p:sldLayoutIdLst>
   <p:txStyles>
     <p:titleStyle>
@@ -1842,7 +1842,7 @@
           <p:cNvPr id="12" name="">
             <a:extLst xmlns:a="http://schemas.openxmlformats.org/drawingml/2006/main">
               <a:ext uri="{FF2B5EF4-FFF2-40B4-BE49-F238E27FC236}">
-                <a16:creationId xmlns:a16="http://schemas.microsoft.com/office/drawing/2014/main" id="{1C01DB92-FD97-4A8F-A405-5E0E381BB3F4}"/>
+                <a16:creationId xmlns:a16="http://schemas.microsoft.com/office/drawing/2014/main" id="{F811B7DB-F330-4044-9200-60F27E4B9A93}"/>
               </a:ext>
             </a:extLst>
           </p:cNvPr>
@@ -1874,7 +1874,7 @@
           <p:cNvPr id="2" name="">
             <a:extLst xmlns:a="http://schemas.openxmlformats.org/drawingml/2006/main">
               <a:ext uri="{FF2B5EF4-FFF2-40B4-BE49-F238E27FC236}">
-                <a16:creationId xmlns:a16="http://schemas.microsoft.com/office/drawing/2014/main" id="{30C5C323-55DE-4410-A264-E56A77DCDF40}"/>
+                <a16:creationId xmlns:a16="http://schemas.microsoft.com/office/drawing/2014/main" id="{18B8F64B-551F-4E54-B65D-0C75062AECF5}"/>
               </a:ext>
             </a:extLst>
           </p:cNvPr>
@@ -1931,7 +1931,7 @@
           <p:cNvPr id="3" name="">
             <a:extLst xmlns:a="http://schemas.openxmlformats.org/drawingml/2006/main">
               <a:ext uri="{FF2B5EF4-FFF2-40B4-BE49-F238E27FC236}">
-                <a16:creationId xmlns:a16="http://schemas.microsoft.com/office/drawing/2014/main" id="{C0CBF55E-821E-4111-8F4E-9E12DDC3ADC2}"/>
+                <a16:creationId xmlns:a16="http://schemas.microsoft.com/office/drawing/2014/main" id="{0CFCE8E9-815F-473B-A53A-DB91F2DCE4D8}"/>
               </a:ext>
             </a:extLst>
           </p:cNvPr>
@@ -1965,7 +1965,7 @@
           <p:cNvPr id="4" name="">
             <a:extLst xmlns:a="http://schemas.openxmlformats.org/drawingml/2006/main">
               <a:ext uri="{FF2B5EF4-FFF2-40B4-BE49-F238E27FC236}">
-                <a16:creationId xmlns:a16="http://schemas.microsoft.com/office/drawing/2014/main" id="{D365C6FA-161B-4D5D-9A82-64D12D26DE12}"/>
+                <a16:creationId xmlns:a16="http://schemas.microsoft.com/office/drawing/2014/main" id="{C0554EB2-2666-4DFF-8CA7-439DEF0B6D17}"/>
               </a:ext>
             </a:extLst>
           </p:cNvPr>
@@ -2022,7 +2022,7 @@
           <p:cNvPr id="5" name="">
             <a:extLst xmlns:a="http://schemas.openxmlformats.org/drawingml/2006/main">
               <a:ext uri="{FF2B5EF4-FFF2-40B4-BE49-F238E27FC236}">
-                <a16:creationId xmlns:a16="http://schemas.microsoft.com/office/drawing/2014/main" id="{49E3BFDE-1C44-41FC-9CC3-D833BF1EC6AA}"/>
+                <a16:creationId xmlns:a16="http://schemas.microsoft.com/office/drawing/2014/main" id="{D92E8DA0-14B2-420D-A28B-948FE26F4E73}"/>
               </a:ext>
             </a:extLst>
           </p:cNvPr>
@@ -2079,7 +2079,7 @@
           <p:cNvPr id="6" name="">
             <a:extLst xmlns:a="http://schemas.openxmlformats.org/drawingml/2006/main">
               <a:ext uri="{FF2B5EF4-FFF2-40B4-BE49-F238E27FC236}">
-                <a16:creationId xmlns:a16="http://schemas.microsoft.com/office/drawing/2014/main" id="{43CF8C57-957E-480B-9C26-767916396749}"/>
+                <a16:creationId xmlns:a16="http://schemas.microsoft.com/office/drawing/2014/main" id="{244EA565-0B1F-4F21-B9CF-A5EBF2539FA2}"/>
               </a:ext>
             </a:extLst>
           </p:cNvPr>
@@ -2113,7 +2113,7 @@
           <p:cNvPr id="7" name="">
             <a:extLst xmlns:a="http://schemas.openxmlformats.org/drawingml/2006/main">
               <a:ext uri="{FF2B5EF4-FFF2-40B4-BE49-F238E27FC236}">
-                <a16:creationId xmlns:a16="http://schemas.microsoft.com/office/drawing/2014/main" id="{0D406F71-4D5B-45A9-953D-336943E80F75}"/>
+                <a16:creationId xmlns:a16="http://schemas.microsoft.com/office/drawing/2014/main" id="{80C96FF1-8485-42D5-BB96-53FDCDE7950B}"/>
               </a:ext>
             </a:extLst>
           </p:cNvPr>
@@ -2170,7 +2170,7 @@
           <p:cNvPr id="8" name="">
             <a:extLst xmlns:a="http://schemas.openxmlformats.org/drawingml/2006/main">
               <a:ext uri="{FF2B5EF4-FFF2-40B4-BE49-F238E27FC236}">
-                <a16:creationId xmlns:a16="http://schemas.microsoft.com/office/drawing/2014/main" id="{D3A52F34-A733-4290-B893-3454CCEC7754}"/>
+                <a16:creationId xmlns:a16="http://schemas.microsoft.com/office/drawing/2014/main" id="{BDE9E7C6-F569-4DDB-BD94-1C3E37DF6CF3}"/>
               </a:ext>
             </a:extLst>
           </p:cNvPr>
@@ -2227,7 +2227,7 @@
           <p:cNvPr id="9" name="">
             <a:extLst xmlns:a="http://schemas.openxmlformats.org/drawingml/2006/main">
               <a:ext uri="{FF2B5EF4-FFF2-40B4-BE49-F238E27FC236}">
-                <a16:creationId xmlns:a16="http://schemas.microsoft.com/office/drawing/2014/main" id="{F3F07267-1E9C-4C85-9C51-DC00D9B83FCC}"/>
+                <a16:creationId xmlns:a16="http://schemas.microsoft.com/office/drawing/2014/main" id="{5E7E8D51-9F8E-41D2-8DEA-822CC4FFE272}"/>
               </a:ext>
             </a:extLst>
           </p:cNvPr>
@@ -2284,7 +2284,7 @@
           <p:cNvPr id="10" name="">
             <a:extLst xmlns:a="http://schemas.openxmlformats.org/drawingml/2006/main">
               <a:ext uri="{FF2B5EF4-FFF2-40B4-BE49-F238E27FC236}">
-                <a16:creationId xmlns:a16="http://schemas.microsoft.com/office/drawing/2014/main" id="{BCDA5D6A-BC29-473C-9A3C-B5A02F1B8D35}"/>
+                <a16:creationId xmlns:a16="http://schemas.microsoft.com/office/drawing/2014/main" id="{FD20F061-6033-4DC5-BD26-8CB8907292F6}"/>
               </a:ext>
             </a:extLst>
           </p:cNvPr>
@@ -2341,7 +2341,7 @@
           <p:cNvPr id="11" name="">
             <a:extLst xmlns:a="http://schemas.openxmlformats.org/drawingml/2006/main">
               <a:ext uri="{FF2B5EF4-FFF2-40B4-BE49-F238E27FC236}">
-                <a16:creationId xmlns:a16="http://schemas.microsoft.com/office/drawing/2014/main" id="{90ED54E2-1325-4CE5-A2F6-DCA6C38571A0}"/>
+                <a16:creationId xmlns:a16="http://schemas.microsoft.com/office/drawing/2014/main" id="{B00719BB-D5B4-41A4-9453-AD0A2E13BC2C}"/>
               </a:ext>
             </a:extLst>
           </p:cNvPr>
@@ -2396,7 +2396,7 @@
     </p:spTree>
     <p:extLst>
       <p:ext uri="{BB962C8B-B14F-4D97-AF65-F5344CB8AC3E}">
-        <p14:creationId xmlns:p14="http://schemas.microsoft.com/office/powerpoint/2010/main" val="1545190606"/>
+        <p14:creationId xmlns:p14="http://schemas.microsoft.com/office/powerpoint/2010/main" val="846549674"/>
       </p:ext>
     </p:extLst>
   </p:cSld>
@@ -2427,7 +2427,7 @@
           <p:cNvPr id="14" name="">
             <a:extLst xmlns:a="http://schemas.openxmlformats.org/drawingml/2006/main">
               <a:ext uri="{FF2B5EF4-FFF2-40B4-BE49-F238E27FC236}">
-                <a16:creationId xmlns:a16="http://schemas.microsoft.com/office/drawing/2014/main" id="{036957D2-E65C-4096-B645-4ED0A959F211}"/>
+                <a16:creationId xmlns:a16="http://schemas.microsoft.com/office/drawing/2014/main" id="{9131329C-47E3-43CF-9538-5AE10AFA3A4F}"/>
               </a:ext>
             </a:extLst>
           </p:cNvPr>
@@ -2459,7 +2459,7 @@
           <p:cNvPr id="2" name="">
             <a:extLst xmlns:a="http://schemas.openxmlformats.org/drawingml/2006/main">
               <a:ext uri="{FF2B5EF4-FFF2-40B4-BE49-F238E27FC236}">
-                <a16:creationId xmlns:a16="http://schemas.microsoft.com/office/drawing/2014/main" id="{93385D45-26E0-4032-B392-FF575E370A8D}"/>
+                <a16:creationId xmlns:a16="http://schemas.microsoft.com/office/drawing/2014/main" id="{B966FE55-7741-437A-8B7C-1B8B8E82199F}"/>
               </a:ext>
             </a:extLst>
           </p:cNvPr>
@@ -2516,7 +2516,7 @@
           <p:cNvPr id="3" name="">
             <a:extLst xmlns:a="http://schemas.openxmlformats.org/drawingml/2006/main">
               <a:ext uri="{FF2B5EF4-FFF2-40B4-BE49-F238E27FC236}">
-                <a16:creationId xmlns:a16="http://schemas.microsoft.com/office/drawing/2014/main" id="{6C3627B5-1226-42E5-8D20-4C55F7DAD776}"/>
+                <a16:creationId xmlns:a16="http://schemas.microsoft.com/office/drawing/2014/main" id="{5E071201-A2B9-45E1-AF7B-80E5A27C1D3E}"/>
               </a:ext>
             </a:extLst>
           </p:cNvPr>
@@ -2548,7 +2548,7 @@
           <p:cNvPr id="4" name="">
             <a:extLst xmlns:a="http://schemas.openxmlformats.org/drawingml/2006/main">
               <a:ext uri="{FF2B5EF4-FFF2-40B4-BE49-F238E27FC236}">
-                <a16:creationId xmlns:a16="http://schemas.microsoft.com/office/drawing/2014/main" id="{55FF4658-F3EE-4F2C-98A1-067CF4C08FBF}"/>
+                <a16:creationId xmlns:a16="http://schemas.microsoft.com/office/drawing/2014/main" id="{98617B55-62A4-4DDF-A98F-15550E48B296}"/>
               </a:ext>
             </a:extLst>
           </p:cNvPr>
@@ -2605,7 +2605,7 @@
           <p:cNvPr id="5" name="">
             <a:extLst xmlns:a="http://schemas.openxmlformats.org/drawingml/2006/main">
               <a:ext uri="{FF2B5EF4-FFF2-40B4-BE49-F238E27FC236}">
-                <a16:creationId xmlns:a16="http://schemas.microsoft.com/office/drawing/2014/main" id="{63A0FA5B-01F6-464B-95E6-C4C7F5BF1A62}"/>
+                <a16:creationId xmlns:a16="http://schemas.microsoft.com/office/drawing/2014/main" id="{326709E1-5517-45F4-B94D-2F6289A5D3B3}"/>
               </a:ext>
             </a:extLst>
           </p:cNvPr>
@@ -2662,7 +2662,7 @@
           <p:cNvPr id="6" name="">
             <a:extLst xmlns:a="http://schemas.openxmlformats.org/drawingml/2006/main">
               <a:ext uri="{FF2B5EF4-FFF2-40B4-BE49-F238E27FC236}">
-                <a16:creationId xmlns:a16="http://schemas.microsoft.com/office/drawing/2014/main" id="{F00DFE5A-D55B-4C7E-A6D0-723143C3ECA3}"/>
+                <a16:creationId xmlns:a16="http://schemas.microsoft.com/office/drawing/2014/main" id="{B2B0E4B1-AD4B-41FA-BF1F-4377F5547576}"/>
               </a:ext>
             </a:extLst>
           </p:cNvPr>
@@ -2719,7 +2719,7 @@
           <p:cNvPr id="7" name="">
             <a:extLst xmlns:a="http://schemas.openxmlformats.org/drawingml/2006/main">
               <a:ext uri="{FF2B5EF4-FFF2-40B4-BE49-F238E27FC236}">
-                <a16:creationId xmlns:a16="http://schemas.microsoft.com/office/drawing/2014/main" id="{E1AE0F12-68E8-44A5-80D2-055F4EFD50D1}"/>
+                <a16:creationId xmlns:a16="http://schemas.microsoft.com/office/drawing/2014/main" id="{188E1FCA-E220-4947-A5EB-5EC4C89C97DB}"/>
               </a:ext>
             </a:extLst>
           </p:cNvPr>
@@ -2751,7 +2751,7 @@
           <p:cNvPr id="8" name="">
             <a:extLst xmlns:a="http://schemas.openxmlformats.org/drawingml/2006/main">
               <a:ext uri="{FF2B5EF4-FFF2-40B4-BE49-F238E27FC236}">
-                <a16:creationId xmlns:a16="http://schemas.microsoft.com/office/drawing/2014/main" id="{07CD2ECE-D668-4F71-BDC2-86DB7AC29F94}"/>
+                <a16:creationId xmlns:a16="http://schemas.microsoft.com/office/drawing/2014/main" id="{5352B431-0C72-4873-80E7-4467D60E15F8}"/>
               </a:ext>
             </a:extLst>
           </p:cNvPr>
@@ -2808,7 +2808,7 @@
           <p:cNvPr id="9" name="">
             <a:extLst xmlns:a="http://schemas.openxmlformats.org/drawingml/2006/main">
               <a:ext uri="{FF2B5EF4-FFF2-40B4-BE49-F238E27FC236}">
-                <a16:creationId xmlns:a16="http://schemas.microsoft.com/office/drawing/2014/main" id="{A33E6C04-68B1-44E0-B8BF-818E188C1328}"/>
+                <a16:creationId xmlns:a16="http://schemas.microsoft.com/office/drawing/2014/main" id="{A10A9239-1DF4-4712-AB79-732174657412}"/>
               </a:ext>
             </a:extLst>
           </p:cNvPr>
@@ -2865,7 +2865,7 @@
           <p:cNvPr id="10" name="">
             <a:extLst xmlns:a="http://schemas.openxmlformats.org/drawingml/2006/main">
               <a:ext uri="{FF2B5EF4-FFF2-40B4-BE49-F238E27FC236}">
-                <a16:creationId xmlns:a16="http://schemas.microsoft.com/office/drawing/2014/main" id="{BDB62C95-326B-44E3-9144-2592D687BFB3}"/>
+                <a16:creationId xmlns:a16="http://schemas.microsoft.com/office/drawing/2014/main" id="{BDDFC790-FB67-499A-A7DC-6F69867A4E86}"/>
               </a:ext>
             </a:extLst>
           </p:cNvPr>
@@ -2922,7 +2922,7 @@
           <p:cNvPr id="11" name="">
             <a:extLst xmlns:a="http://schemas.openxmlformats.org/drawingml/2006/main">
               <a:ext uri="{FF2B5EF4-FFF2-40B4-BE49-F238E27FC236}">
-                <a16:creationId xmlns:a16="http://schemas.microsoft.com/office/drawing/2014/main" id="{F82EF680-835D-4ACA-941D-7515D5410E4B}"/>
+                <a16:creationId xmlns:a16="http://schemas.microsoft.com/office/drawing/2014/main" id="{CFE4FDCD-D535-4A65-BDF4-A090E009E96C}"/>
               </a:ext>
             </a:extLst>
           </p:cNvPr>
@@ -2979,7 +2979,7 @@
           <p:cNvPr id="12" name="">
             <a:extLst xmlns:a="http://schemas.openxmlformats.org/drawingml/2006/main">
               <a:ext uri="{FF2B5EF4-FFF2-40B4-BE49-F238E27FC236}">
-                <a16:creationId xmlns:a16="http://schemas.microsoft.com/office/drawing/2014/main" id="{6265B413-3E96-44FE-8AE5-BEEFB9D39068}"/>
+                <a16:creationId xmlns:a16="http://schemas.microsoft.com/office/drawing/2014/main" id="{E472A735-7BBD-45A3-9A7A-E27CDB8748D2}"/>
               </a:ext>
             </a:extLst>
           </p:cNvPr>
@@ -3036,7 +3036,7 @@
           <p:cNvPr id="13" name="">
             <a:extLst xmlns:a="http://schemas.openxmlformats.org/drawingml/2006/main">
               <a:ext uri="{FF2B5EF4-FFF2-40B4-BE49-F238E27FC236}">
-                <a16:creationId xmlns:a16="http://schemas.microsoft.com/office/drawing/2014/main" id="{FA597EBC-8F39-492E-A11A-5B9FFC1529EF}"/>
+                <a16:creationId xmlns:a16="http://schemas.microsoft.com/office/drawing/2014/main" id="{ED829A47-8365-4836-8786-B17BD1D97D43}"/>
               </a:ext>
             </a:extLst>
           </p:cNvPr>
@@ -3091,7 +3091,7 @@
     </p:spTree>
     <p:extLst>
       <p:ext uri="{BB962C8B-B14F-4D97-AF65-F5344CB8AC3E}">
-        <p14:creationId xmlns:p14="http://schemas.microsoft.com/office/powerpoint/2010/main" val="431619545"/>
+        <p14:creationId xmlns:p14="http://schemas.microsoft.com/office/powerpoint/2010/main" val="1852859920"/>
       </p:ext>
     </p:extLst>
   </p:cSld>
@@ -3292,7 +3292,7 @@
           <p:cNvPr id="19" name="">
             <a:extLst xmlns:a="http://schemas.openxmlformats.org/drawingml/2006/main">
               <a:ext uri="{FF2B5EF4-FFF2-40B4-BE49-F238E27FC236}">
-                <a16:creationId xmlns:a16="http://schemas.microsoft.com/office/drawing/2014/main" id="{6BF29393-1DCC-4508-9BB2-1F0E779B728D}"/>
+                <a16:creationId xmlns:a16="http://schemas.microsoft.com/office/drawing/2014/main" id="{9ADBAF66-59C3-42D7-9C0A-F99AA8F25266}"/>
               </a:ext>
             </a:extLst>
           </p:cNvPr>
@@ -3324,7 +3324,7 @@
           <p:cNvPr id="2" name="">
             <a:extLst xmlns:a="http://schemas.openxmlformats.org/drawingml/2006/main">
               <a:ext uri="{FF2B5EF4-FFF2-40B4-BE49-F238E27FC236}">
-                <a16:creationId xmlns:a16="http://schemas.microsoft.com/office/drawing/2014/main" id="{96E44EDA-9AC3-4297-A7E8-CB91DE46278B}"/>
+                <a16:creationId xmlns:a16="http://schemas.microsoft.com/office/drawing/2014/main" id="{A3670C20-DF60-4916-A7DC-6F476DE3CD01}"/>
               </a:ext>
             </a:extLst>
           </p:cNvPr>
@@ -3381,7 +3381,7 @@
           <p:cNvPr id="3" name="">
             <a:extLst xmlns:a="http://schemas.openxmlformats.org/drawingml/2006/main">
               <a:ext uri="{FF2B5EF4-FFF2-40B4-BE49-F238E27FC236}">
-                <a16:creationId xmlns:a16="http://schemas.microsoft.com/office/drawing/2014/main" id="{AFBE691A-DD6B-4CAC-8128-1C24E2D53B07}"/>
+                <a16:creationId xmlns:a16="http://schemas.microsoft.com/office/drawing/2014/main" id="{A7E6075A-BB23-4B62-9D6D-7BE82E7C510E}"/>
               </a:ext>
             </a:extLst>
           </p:cNvPr>
@@ -3413,7 +3413,7 @@
           <p:cNvPr id="4" name="">
             <a:extLst xmlns:a="http://schemas.openxmlformats.org/drawingml/2006/main">
               <a:ext uri="{FF2B5EF4-FFF2-40B4-BE49-F238E27FC236}">
-                <a16:creationId xmlns:a16="http://schemas.microsoft.com/office/drawing/2014/main" id="{A5276DD7-8470-4A03-8AF9-311FF0507F8E}"/>
+                <a16:creationId xmlns:a16="http://schemas.microsoft.com/office/drawing/2014/main" id="{AC7542B6-AD4B-450E-943E-0C39E7B90F4F}"/>
               </a:ext>
             </a:extLst>
           </p:cNvPr>
@@ -3470,7 +3470,7 @@
           <p:cNvPr id="5" name="">
             <a:extLst xmlns:a="http://schemas.openxmlformats.org/drawingml/2006/main">
               <a:ext uri="{FF2B5EF4-FFF2-40B4-BE49-F238E27FC236}">
-                <a16:creationId xmlns:a16="http://schemas.microsoft.com/office/drawing/2014/main" id="{9CD75F43-6BFE-48EE-B418-1DA660633317}"/>
+                <a16:creationId xmlns:a16="http://schemas.microsoft.com/office/drawing/2014/main" id="{97DAD660-FC19-49DF-87A0-67F0A608F7CD}"/>
               </a:ext>
             </a:extLst>
           </p:cNvPr>
@@ -3527,7 +3527,7 @@
           <p:cNvPr id="6" name="">
             <a:extLst xmlns:a="http://schemas.openxmlformats.org/drawingml/2006/main">
               <a:ext uri="{FF2B5EF4-FFF2-40B4-BE49-F238E27FC236}">
-                <a16:creationId xmlns:a16="http://schemas.microsoft.com/office/drawing/2014/main" id="{868817BC-8FF3-4D9D-8E7C-3ABD1E8E4E2A}"/>
+                <a16:creationId xmlns:a16="http://schemas.microsoft.com/office/drawing/2014/main" id="{D6394E00-2017-4793-AD12-BD6CC9756DF5}"/>
               </a:ext>
             </a:extLst>
           </p:cNvPr>
@@ -3584,7 +3584,7 @@
           <p:cNvPr id="7" name="">
             <a:extLst xmlns:a="http://schemas.openxmlformats.org/drawingml/2006/main">
               <a:ext uri="{FF2B5EF4-FFF2-40B4-BE49-F238E27FC236}">
-                <a16:creationId xmlns:a16="http://schemas.microsoft.com/office/drawing/2014/main" id="{EBE06EF5-117A-48F4-8B45-B64C550C658E}"/>
+                <a16:creationId xmlns:a16="http://schemas.microsoft.com/office/drawing/2014/main" id="{952EF16F-E102-43BF-9705-51CA815248E4}"/>
               </a:ext>
             </a:extLst>
           </p:cNvPr>
@@ -3616,7 +3616,7 @@
           <p:cNvPr id="8" name="">
             <a:extLst xmlns:a="http://schemas.openxmlformats.org/drawingml/2006/main">
               <a:ext uri="{FF2B5EF4-FFF2-40B4-BE49-F238E27FC236}">
-                <a16:creationId xmlns:a16="http://schemas.microsoft.com/office/drawing/2014/main" id="{D0076DC4-9BE3-4CB5-BE24-DA409AE1E55C}"/>
+                <a16:creationId xmlns:a16="http://schemas.microsoft.com/office/drawing/2014/main" id="{BDAA278B-B58A-4A5D-8060-2A06A29A2FDF}"/>
               </a:ext>
             </a:extLst>
           </p:cNvPr>
@@ -3673,7 +3673,7 @@
           <p:cNvPr id="9" name="">
             <a:extLst xmlns:a="http://schemas.openxmlformats.org/drawingml/2006/main">
               <a:ext uri="{FF2B5EF4-FFF2-40B4-BE49-F238E27FC236}">
-                <a16:creationId xmlns:a16="http://schemas.microsoft.com/office/drawing/2014/main" id="{30F93709-5FD0-4B27-9C4F-3A5F2D5AFEBA}"/>
+                <a16:creationId xmlns:a16="http://schemas.microsoft.com/office/drawing/2014/main" id="{B8D189E1-9E3B-4309-9C66-6C3930B841B1}"/>
               </a:ext>
             </a:extLst>
           </p:cNvPr>
@@ -3730,7 +3730,7 @@
           <p:cNvPr id="10" name="">
             <a:extLst xmlns:a="http://schemas.openxmlformats.org/drawingml/2006/main">
               <a:ext uri="{FF2B5EF4-FFF2-40B4-BE49-F238E27FC236}">
-                <a16:creationId xmlns:a16="http://schemas.microsoft.com/office/drawing/2014/main" id="{9458E93B-6D8C-4149-BEA2-48B1FD85F102}"/>
+                <a16:creationId xmlns:a16="http://schemas.microsoft.com/office/drawing/2014/main" id="{6AA640C8-0428-45D6-B8FE-69678F1D2336}"/>
               </a:ext>
             </a:extLst>
           </p:cNvPr>
@@ -3787,7 +3787,7 @@
           <p:cNvPr id="11" name="">
             <a:extLst xmlns:a="http://schemas.openxmlformats.org/drawingml/2006/main">
               <a:ext uri="{FF2B5EF4-FFF2-40B4-BE49-F238E27FC236}">
-                <a16:creationId xmlns:a16="http://schemas.microsoft.com/office/drawing/2014/main" id="{8E436489-5EF3-42C0-9DDA-1378030296B8}"/>
+                <a16:creationId xmlns:a16="http://schemas.microsoft.com/office/drawing/2014/main" id="{A93686C4-07AB-430F-83F6-BBBB5798B62D}"/>
               </a:ext>
             </a:extLst>
           </p:cNvPr>
@@ -3821,7 +3821,7 @@
           <p:cNvPr id="12" name="">
             <a:extLst xmlns:a="http://schemas.openxmlformats.org/drawingml/2006/main">
               <a:ext uri="{FF2B5EF4-FFF2-40B4-BE49-F238E27FC236}">
-                <a16:creationId xmlns:a16="http://schemas.microsoft.com/office/drawing/2014/main" id="{099BFD4F-878B-41DE-895E-E4965DA94E00}"/>
+                <a16:creationId xmlns:a16="http://schemas.microsoft.com/office/drawing/2014/main" id="{AE95643C-AA3F-4A30-B9FC-0165A18B1379}"/>
               </a:ext>
             </a:extLst>
           </p:cNvPr>
@@ -3878,7 +3878,7 @@
           <p:cNvPr id="13" name="">
             <a:extLst xmlns:a="http://schemas.openxmlformats.org/drawingml/2006/main">
               <a:ext uri="{FF2B5EF4-FFF2-40B4-BE49-F238E27FC236}">
-                <a16:creationId xmlns:a16="http://schemas.microsoft.com/office/drawing/2014/main" id="{2C843352-DCFC-41B0-B5B0-17B3DA1CF3B1}"/>
+                <a16:creationId xmlns:a16="http://schemas.microsoft.com/office/drawing/2014/main" id="{7CC5D618-D46D-4995-979B-31D469DF7375}"/>
               </a:ext>
             </a:extLst>
           </p:cNvPr>
@@ -3935,7 +3935,7 @@
           <p:cNvPr id="14" name="">
             <a:extLst xmlns:a="http://schemas.openxmlformats.org/drawingml/2006/main">
               <a:ext uri="{FF2B5EF4-FFF2-40B4-BE49-F238E27FC236}">
-                <a16:creationId xmlns:a16="http://schemas.microsoft.com/office/drawing/2014/main" id="{8CAE589A-5D4D-4E8E-8DCB-8C33B8A352A5}"/>
+                <a16:creationId xmlns:a16="http://schemas.microsoft.com/office/drawing/2014/main" id="{85907390-6A0D-411B-BDDC-D5A7BD6F8822}"/>
               </a:ext>
             </a:extLst>
           </p:cNvPr>
@@ -3992,7 +3992,7 @@
           <p:cNvPr id="15" name="">
             <a:extLst xmlns:a="http://schemas.openxmlformats.org/drawingml/2006/main">
               <a:ext uri="{FF2B5EF4-FFF2-40B4-BE49-F238E27FC236}">
-                <a16:creationId xmlns:a16="http://schemas.microsoft.com/office/drawing/2014/main" id="{9F0111E3-0CC4-4585-9CB8-72E635F2DB0B}"/>
+                <a16:creationId xmlns:a16="http://schemas.microsoft.com/office/drawing/2014/main" id="{784A2EA3-DF24-4CDC-909F-9D2C2B389B60}"/>
               </a:ext>
             </a:extLst>
           </p:cNvPr>
@@ -4026,7 +4026,7 @@
           <p:cNvPr id="16" name="">
             <a:extLst xmlns:a="http://schemas.openxmlformats.org/drawingml/2006/main">
               <a:ext uri="{FF2B5EF4-FFF2-40B4-BE49-F238E27FC236}">
-                <a16:creationId xmlns:a16="http://schemas.microsoft.com/office/drawing/2014/main" id="{C0FC3E08-497E-4E2F-B90D-52F31B343D89}"/>
+                <a16:creationId xmlns:a16="http://schemas.microsoft.com/office/drawing/2014/main" id="{C7FC5954-22A2-41F2-B3D8-0E375F013321}"/>
               </a:ext>
             </a:extLst>
           </p:cNvPr>
@@ -4083,7 +4083,7 @@
           <p:cNvPr id="17" name="">
             <a:extLst xmlns:a="http://schemas.openxmlformats.org/drawingml/2006/main">
               <a:ext uri="{FF2B5EF4-FFF2-40B4-BE49-F238E27FC236}">
-                <a16:creationId xmlns:a16="http://schemas.microsoft.com/office/drawing/2014/main" id="{D581FDF5-BCC1-4C00-BF47-2D922E49EAC3}"/>
+                <a16:creationId xmlns:a16="http://schemas.microsoft.com/office/drawing/2014/main" id="{CE995DC7-2AFF-4535-A399-5D307B0EE83B}"/>
               </a:ext>
             </a:extLst>
           </p:cNvPr>
@@ -4140,7 +4140,7 @@
           <p:cNvPr id="18" name="">
             <a:extLst xmlns:a="http://schemas.openxmlformats.org/drawingml/2006/main">
               <a:ext uri="{FF2B5EF4-FFF2-40B4-BE49-F238E27FC236}">
-                <a16:creationId xmlns:a16="http://schemas.microsoft.com/office/drawing/2014/main" id="{B4AA5AC5-7943-423F-8B74-AAE53D1CD7D0}"/>
+                <a16:creationId xmlns:a16="http://schemas.microsoft.com/office/drawing/2014/main" id="{FB397AFD-5404-4668-858E-ED8B1A7BD4C2}"/>
               </a:ext>
             </a:extLst>
           </p:cNvPr>
@@ -4195,7 +4195,7 @@
     </p:spTree>
     <p:extLst>
       <p:ext uri="{BB962C8B-B14F-4D97-AF65-F5344CB8AC3E}">
-        <p14:creationId xmlns:p14="http://schemas.microsoft.com/office/powerpoint/2010/main" val="920156823"/>
+        <p14:creationId xmlns:p14="http://schemas.microsoft.com/office/powerpoint/2010/main" val="1590676488"/>
       </p:ext>
     </p:extLst>
   </p:cSld>
@@ -4350,7 +4350,7 @@
           <p:cNvPr id="23" name="">
             <a:extLst xmlns:a="http://schemas.openxmlformats.org/drawingml/2006/main">
               <a:ext uri="{FF2B5EF4-FFF2-40B4-BE49-F238E27FC236}">
-                <a16:creationId xmlns:a16="http://schemas.microsoft.com/office/drawing/2014/main" id="{DC41E9CB-E5F9-4E2B-90D1-0AB4B0F010A6}"/>
+                <a16:creationId xmlns:a16="http://schemas.microsoft.com/office/drawing/2014/main" id="{467EDA2D-5F4D-41AD-B43F-1629F0886A99}"/>
               </a:ext>
             </a:extLst>
           </p:cNvPr>
@@ -4382,7 +4382,7 @@
           <p:cNvPr id="2" name="">
             <a:extLst xmlns:a="http://schemas.openxmlformats.org/drawingml/2006/main">
               <a:ext uri="{FF2B5EF4-FFF2-40B4-BE49-F238E27FC236}">
-                <a16:creationId xmlns:a16="http://schemas.microsoft.com/office/drawing/2014/main" id="{5760AE77-06F3-4EA0-9194-CEF802ED6F11}"/>
+                <a16:creationId xmlns:a16="http://schemas.microsoft.com/office/drawing/2014/main" id="{E09B6512-2B7E-48C9-A386-CEF9E33CB2A8}"/>
               </a:ext>
             </a:extLst>
           </p:cNvPr>
@@ -4439,7 +4439,7 @@
           <p:cNvPr id="3" name="">
             <a:extLst xmlns:a="http://schemas.openxmlformats.org/drawingml/2006/main">
               <a:ext uri="{FF2B5EF4-FFF2-40B4-BE49-F238E27FC236}">
-                <a16:creationId xmlns:a16="http://schemas.microsoft.com/office/drawing/2014/main" id="{0534C038-BC3B-42EF-8FFC-71877BE29BEB}"/>
+                <a16:creationId xmlns:a16="http://schemas.microsoft.com/office/drawing/2014/main" id="{42A033C8-4CFD-4E3A-B31B-5B918CE6CB22}"/>
               </a:ext>
             </a:extLst>
           </p:cNvPr>
@@ -4471,7 +4471,7 @@
           <p:cNvPr id="4" name="">
             <a:extLst xmlns:a="http://schemas.openxmlformats.org/drawingml/2006/main">
               <a:ext uri="{FF2B5EF4-FFF2-40B4-BE49-F238E27FC236}">
-                <a16:creationId xmlns:a16="http://schemas.microsoft.com/office/drawing/2014/main" id="{2BAF6102-EBAA-44EE-894A-413538B755F1}"/>
+                <a16:creationId xmlns:a16="http://schemas.microsoft.com/office/drawing/2014/main" id="{DD4501A4-EC42-4B26-BE57-E9F10E0DA75E}"/>
               </a:ext>
             </a:extLst>
           </p:cNvPr>
@@ -4528,7 +4528,7 @@
           <p:cNvPr id="5" name="">
             <a:extLst xmlns:a="http://schemas.openxmlformats.org/drawingml/2006/main">
               <a:ext uri="{FF2B5EF4-FFF2-40B4-BE49-F238E27FC236}">
-                <a16:creationId xmlns:a16="http://schemas.microsoft.com/office/drawing/2014/main" id="{EA2971F2-9A9B-420C-889F-09179C7DB00D}"/>
+                <a16:creationId xmlns:a16="http://schemas.microsoft.com/office/drawing/2014/main" id="{ACE1DFB3-5604-4F47-92C8-A580256048A7}"/>
               </a:ext>
             </a:extLst>
           </p:cNvPr>
@@ -4585,7 +4585,7 @@
           <p:cNvPr id="6" name="">
             <a:extLst xmlns:a="http://schemas.openxmlformats.org/drawingml/2006/main">
               <a:ext uri="{FF2B5EF4-FFF2-40B4-BE49-F238E27FC236}">
-                <a16:creationId xmlns:a16="http://schemas.microsoft.com/office/drawing/2014/main" id="{6769F655-3483-479A-A9B1-E26693FDF6C2}"/>
+                <a16:creationId xmlns:a16="http://schemas.microsoft.com/office/drawing/2014/main" id="{0407393B-1D62-4BDF-A634-54E1F81B7C12}"/>
               </a:ext>
             </a:extLst>
           </p:cNvPr>
@@ -4642,7 +4642,7 @@
           <p:cNvPr id="7" name="">
             <a:extLst xmlns:a="http://schemas.openxmlformats.org/drawingml/2006/main">
               <a:ext uri="{FF2B5EF4-FFF2-40B4-BE49-F238E27FC236}">
-                <a16:creationId xmlns:a16="http://schemas.microsoft.com/office/drawing/2014/main" id="{D639848D-0522-40A6-B24E-5E1230DB4258}"/>
+                <a16:creationId xmlns:a16="http://schemas.microsoft.com/office/drawing/2014/main" id="{F0E61D08-0DBB-42D9-B55D-6BD85646FBFC}"/>
               </a:ext>
             </a:extLst>
           </p:cNvPr>
@@ -4674,7 +4674,7 @@
           <p:cNvPr id="8" name="">
             <a:extLst xmlns:a="http://schemas.openxmlformats.org/drawingml/2006/main">
               <a:ext uri="{FF2B5EF4-FFF2-40B4-BE49-F238E27FC236}">
-                <a16:creationId xmlns:a16="http://schemas.microsoft.com/office/drawing/2014/main" id="{74962668-AFC4-4B72-B14A-62B3230EF68E}"/>
+                <a16:creationId xmlns:a16="http://schemas.microsoft.com/office/drawing/2014/main" id="{15B27DEF-B2E3-4391-A236-B52A566551C2}"/>
               </a:ext>
             </a:extLst>
           </p:cNvPr>
@@ -4731,7 +4731,7 @@
           <p:cNvPr id="9" name="">
             <a:extLst xmlns:a="http://schemas.openxmlformats.org/drawingml/2006/main">
               <a:ext uri="{FF2B5EF4-FFF2-40B4-BE49-F238E27FC236}">
-                <a16:creationId xmlns:a16="http://schemas.microsoft.com/office/drawing/2014/main" id="{84A13868-8CAF-4A51-B9FC-2D4A9FD666C5}"/>
+                <a16:creationId xmlns:a16="http://schemas.microsoft.com/office/drawing/2014/main" id="{E20404E2-1567-4DDE-AC69-273CF38ABF6A}"/>
               </a:ext>
             </a:extLst>
           </p:cNvPr>
@@ -4788,7 +4788,7 @@
           <p:cNvPr id="10" name="">
             <a:extLst xmlns:a="http://schemas.openxmlformats.org/drawingml/2006/main">
               <a:ext uri="{FF2B5EF4-FFF2-40B4-BE49-F238E27FC236}">
-                <a16:creationId xmlns:a16="http://schemas.microsoft.com/office/drawing/2014/main" id="{278E23D3-3814-4B47-A7E9-9FA84D514C10}"/>
+                <a16:creationId xmlns:a16="http://schemas.microsoft.com/office/drawing/2014/main" id="{92BC0912-F997-4544-81A3-73C6EC39C210}"/>
               </a:ext>
             </a:extLst>
           </p:cNvPr>
@@ -4822,7 +4822,7 @@
           <p:cNvPr id="11" name="">
             <a:extLst xmlns:a="http://schemas.openxmlformats.org/drawingml/2006/main">
               <a:ext uri="{FF2B5EF4-FFF2-40B4-BE49-F238E27FC236}">
-                <a16:creationId xmlns:a16="http://schemas.microsoft.com/office/drawing/2014/main" id="{08D72403-9E47-4DD9-9648-64A73ECDC4AE}"/>
+                <a16:creationId xmlns:a16="http://schemas.microsoft.com/office/drawing/2014/main" id="{B1EE56E3-95C7-4F37-8462-8D083C200329}"/>
               </a:ext>
             </a:extLst>
           </p:cNvPr>
@@ -4854,7 +4854,7 @@
           <p:cNvPr id="12" name="">
             <a:extLst xmlns:a="http://schemas.openxmlformats.org/drawingml/2006/main">
               <a:ext uri="{FF2B5EF4-FFF2-40B4-BE49-F238E27FC236}">
-                <a16:creationId xmlns:a16="http://schemas.microsoft.com/office/drawing/2014/main" id="{37D9FFDD-35C4-42A2-97AD-D29CE676272F}"/>
+                <a16:creationId xmlns:a16="http://schemas.microsoft.com/office/drawing/2014/main" id="{5DD43DC4-7852-4F86-800B-2B0F6E3E5222}"/>
               </a:ext>
             </a:extLst>
           </p:cNvPr>
@@ -4911,7 +4911,7 @@
           <p:cNvPr id="13" name="">
             <a:extLst xmlns:a="http://schemas.openxmlformats.org/drawingml/2006/main">
               <a:ext uri="{FF2B5EF4-FFF2-40B4-BE49-F238E27FC236}">
-                <a16:creationId xmlns:a16="http://schemas.microsoft.com/office/drawing/2014/main" id="{934AF0FF-68D0-47E8-B8F9-49169B0C5A98}"/>
+                <a16:creationId xmlns:a16="http://schemas.microsoft.com/office/drawing/2014/main" id="{226A386B-2101-4911-B604-6692E8E84329}"/>
               </a:ext>
             </a:extLst>
           </p:cNvPr>
@@ -4968,7 +4968,7 @@
           <p:cNvPr id="14" name="">
             <a:extLst xmlns:a="http://schemas.openxmlformats.org/drawingml/2006/main">
               <a:ext uri="{FF2B5EF4-FFF2-40B4-BE49-F238E27FC236}">
-                <a16:creationId xmlns:a16="http://schemas.microsoft.com/office/drawing/2014/main" id="{A3935096-CB12-41CF-B55C-A09F761BCCE3}"/>
+                <a16:creationId xmlns:a16="http://schemas.microsoft.com/office/drawing/2014/main" id="{CAFB7F70-DAB2-4173-862B-DC759562768C}"/>
               </a:ext>
             </a:extLst>
           </p:cNvPr>
@@ -5002,7 +5002,7 @@
           <p:cNvPr id="15" name="">
             <a:extLst xmlns:a="http://schemas.openxmlformats.org/drawingml/2006/main">
               <a:ext uri="{FF2B5EF4-FFF2-40B4-BE49-F238E27FC236}">
-                <a16:creationId xmlns:a16="http://schemas.microsoft.com/office/drawing/2014/main" id="{DDA84157-B023-414D-A78A-4E4C0EF23F9D}"/>
+                <a16:creationId xmlns:a16="http://schemas.microsoft.com/office/drawing/2014/main" id="{12672E12-B708-4C02-9272-82535B3D9AF1}"/>
               </a:ext>
             </a:extLst>
           </p:cNvPr>
@@ -5034,7 +5034,7 @@
           <p:cNvPr id="16" name="">
             <a:extLst xmlns:a="http://schemas.openxmlformats.org/drawingml/2006/main">
               <a:ext uri="{FF2B5EF4-FFF2-40B4-BE49-F238E27FC236}">
-                <a16:creationId xmlns:a16="http://schemas.microsoft.com/office/drawing/2014/main" id="{BD18954C-D207-4800-BBFD-4226682A4487}"/>
+                <a16:creationId xmlns:a16="http://schemas.microsoft.com/office/drawing/2014/main" id="{EE0527D0-F0CB-4BFB-B623-4C96457BAB29}"/>
               </a:ext>
             </a:extLst>
           </p:cNvPr>
@@ -5091,7 +5091,7 @@
           <p:cNvPr id="17" name="">
             <a:extLst xmlns:a="http://schemas.openxmlformats.org/drawingml/2006/main">
               <a:ext uri="{FF2B5EF4-FFF2-40B4-BE49-F238E27FC236}">
-                <a16:creationId xmlns:a16="http://schemas.microsoft.com/office/drawing/2014/main" id="{5A02426B-027D-4296-8087-A6D01A7B1C22}"/>
+                <a16:creationId xmlns:a16="http://schemas.microsoft.com/office/drawing/2014/main" id="{CC9AE389-1792-41D3-8757-30DE3C897E14}"/>
               </a:ext>
             </a:extLst>
           </p:cNvPr>
@@ -5148,7 +5148,7 @@
           <p:cNvPr id="18" name="">
             <a:extLst xmlns:a="http://schemas.openxmlformats.org/drawingml/2006/main">
               <a:ext uri="{FF2B5EF4-FFF2-40B4-BE49-F238E27FC236}">
-                <a16:creationId xmlns:a16="http://schemas.microsoft.com/office/drawing/2014/main" id="{2256B1D2-348B-4188-B64B-0AA463C726E9}"/>
+                <a16:creationId xmlns:a16="http://schemas.microsoft.com/office/drawing/2014/main" id="{2E4088A9-B900-42C4-BE80-95AF6261F87D}"/>
               </a:ext>
             </a:extLst>
           </p:cNvPr>
@@ -5182,7 +5182,7 @@
           <p:cNvPr id="19" name="">
             <a:extLst xmlns:a="http://schemas.openxmlformats.org/drawingml/2006/main">
               <a:ext uri="{FF2B5EF4-FFF2-40B4-BE49-F238E27FC236}">
-                <a16:creationId xmlns:a16="http://schemas.microsoft.com/office/drawing/2014/main" id="{1799BC54-20CD-4D1C-B833-BC5564A7E045}"/>
+                <a16:creationId xmlns:a16="http://schemas.microsoft.com/office/drawing/2014/main" id="{7FFB5BA9-9526-42FA-A909-B63A92775998}"/>
               </a:ext>
             </a:extLst>
           </p:cNvPr>
@@ -5214,7 +5214,7 @@
           <p:cNvPr id="20" name="">
             <a:extLst xmlns:a="http://schemas.openxmlformats.org/drawingml/2006/main">
               <a:ext uri="{FF2B5EF4-FFF2-40B4-BE49-F238E27FC236}">
-                <a16:creationId xmlns:a16="http://schemas.microsoft.com/office/drawing/2014/main" id="{424A2D3F-A36D-467F-B56B-7E849E824E51}"/>
+                <a16:creationId xmlns:a16="http://schemas.microsoft.com/office/drawing/2014/main" id="{D4D3BB11-6231-4036-B013-63F84DB35863}"/>
               </a:ext>
             </a:extLst>
           </p:cNvPr>
@@ -5271,7 +5271,7 @@
           <p:cNvPr id="21" name="">
             <a:extLst xmlns:a="http://schemas.openxmlformats.org/drawingml/2006/main">
               <a:ext uri="{FF2B5EF4-FFF2-40B4-BE49-F238E27FC236}">
-                <a16:creationId xmlns:a16="http://schemas.microsoft.com/office/drawing/2014/main" id="{0DF0E567-8653-46D9-AC42-08C20ED67A6B}"/>
+                <a16:creationId xmlns:a16="http://schemas.microsoft.com/office/drawing/2014/main" id="{1690D5C3-1D5C-4A7E-A769-96ACF5A68F7F}"/>
               </a:ext>
             </a:extLst>
           </p:cNvPr>
@@ -5328,7 +5328,7 @@
           <p:cNvPr id="22" name="">
             <a:extLst xmlns:a="http://schemas.openxmlformats.org/drawingml/2006/main">
               <a:ext uri="{FF2B5EF4-FFF2-40B4-BE49-F238E27FC236}">
-                <a16:creationId xmlns:a16="http://schemas.microsoft.com/office/drawing/2014/main" id="{8241FBE0-DDC4-47F0-B868-7ED9DCFD1AD1}"/>
+                <a16:creationId xmlns:a16="http://schemas.microsoft.com/office/drawing/2014/main" id="{27F55628-1297-4DE0-9AA5-EA0BF0A8436D}"/>
               </a:ext>
             </a:extLst>
           </p:cNvPr>
@@ -5383,7 +5383,7 @@
     </p:spTree>
     <p:extLst>
       <p:ext uri="{BB962C8B-B14F-4D97-AF65-F5344CB8AC3E}">
-        <p14:creationId xmlns:p14="http://schemas.microsoft.com/office/powerpoint/2010/main" val="546192415"/>
+        <p14:creationId xmlns:p14="http://schemas.microsoft.com/office/powerpoint/2010/main" val="715961139"/>
       </p:ext>
     </p:extLst>
   </p:cSld>
@@ -5584,7 +5584,7 @@
           <p:cNvPr id="23" name="">
             <a:extLst xmlns:a="http://schemas.openxmlformats.org/drawingml/2006/main">
               <a:ext uri="{FF2B5EF4-FFF2-40B4-BE49-F238E27FC236}">
-                <a16:creationId xmlns:a16="http://schemas.microsoft.com/office/drawing/2014/main" id="{3E0FE425-CD7D-4B29-9E03-8C4CDDCED6BD}"/>
+                <a16:creationId xmlns:a16="http://schemas.microsoft.com/office/drawing/2014/main" id="{016FCC04-5540-47BF-81BC-278ABEAC3645}"/>
               </a:ext>
             </a:extLst>
           </p:cNvPr>
@@ -5616,7 +5616,7 @@
           <p:cNvPr id="2" name="">
             <a:extLst xmlns:a="http://schemas.openxmlformats.org/drawingml/2006/main">
               <a:ext uri="{FF2B5EF4-FFF2-40B4-BE49-F238E27FC236}">
-                <a16:creationId xmlns:a16="http://schemas.microsoft.com/office/drawing/2014/main" id="{77320E04-C1FF-4F7D-ACFE-F43D48C666D0}"/>
+                <a16:creationId xmlns:a16="http://schemas.microsoft.com/office/drawing/2014/main" id="{7CAA2DCA-EA51-43EB-94D3-6E1D40001E78}"/>
               </a:ext>
             </a:extLst>
           </p:cNvPr>
@@ -5673,7 +5673,7 @@
           <p:cNvPr id="3" name="">
             <a:extLst xmlns:a="http://schemas.openxmlformats.org/drawingml/2006/main">
               <a:ext uri="{FF2B5EF4-FFF2-40B4-BE49-F238E27FC236}">
-                <a16:creationId xmlns:a16="http://schemas.microsoft.com/office/drawing/2014/main" id="{5DE166DB-BA2B-4A78-8434-2660636DDF9B}"/>
+                <a16:creationId xmlns:a16="http://schemas.microsoft.com/office/drawing/2014/main" id="{2C1FF6B1-9FA0-4942-B146-9B5076482D4E}"/>
               </a:ext>
             </a:extLst>
           </p:cNvPr>
@@ -5705,7 +5705,7 @@
           <p:cNvPr id="4" name="">
             <a:extLst xmlns:a="http://schemas.openxmlformats.org/drawingml/2006/main">
               <a:ext uri="{FF2B5EF4-FFF2-40B4-BE49-F238E27FC236}">
-                <a16:creationId xmlns:a16="http://schemas.microsoft.com/office/drawing/2014/main" id="{1528A244-9EBB-4E77-9C47-506BE5746953}"/>
+                <a16:creationId xmlns:a16="http://schemas.microsoft.com/office/drawing/2014/main" id="{7C4EDE9F-1A89-431D-99FB-26D417205510}"/>
               </a:ext>
             </a:extLst>
           </p:cNvPr>
@@ -5762,7 +5762,7 @@
           <p:cNvPr id="5" name="">
             <a:extLst xmlns:a="http://schemas.openxmlformats.org/drawingml/2006/main">
               <a:ext uri="{FF2B5EF4-FFF2-40B4-BE49-F238E27FC236}">
-                <a16:creationId xmlns:a16="http://schemas.microsoft.com/office/drawing/2014/main" id="{67640E74-380D-4783-A764-A8444B5C4CF8}"/>
+                <a16:creationId xmlns:a16="http://schemas.microsoft.com/office/drawing/2014/main" id="{C0868DC2-0E9C-4934-85BD-637A0DF6AF97}"/>
               </a:ext>
             </a:extLst>
           </p:cNvPr>
@@ -5819,7 +5819,7 @@
           <p:cNvPr id="6" name="">
             <a:extLst xmlns:a="http://schemas.openxmlformats.org/drawingml/2006/main">
               <a:ext uri="{FF2B5EF4-FFF2-40B4-BE49-F238E27FC236}">
-                <a16:creationId xmlns:a16="http://schemas.microsoft.com/office/drawing/2014/main" id="{C3594C90-4DF5-4B08-AD5F-6063BF21DCCE}"/>
+                <a16:creationId xmlns:a16="http://schemas.microsoft.com/office/drawing/2014/main" id="{E4D463A5-C820-47E3-B11C-8D9ABA492213}"/>
               </a:ext>
             </a:extLst>
           </p:cNvPr>
@@ -5876,7 +5876,7 @@
           <p:cNvPr id="7" name="">
             <a:extLst xmlns:a="http://schemas.openxmlformats.org/drawingml/2006/main">
               <a:ext uri="{FF2B5EF4-FFF2-40B4-BE49-F238E27FC236}">
-                <a16:creationId xmlns:a16="http://schemas.microsoft.com/office/drawing/2014/main" id="{964FBAF9-CC5D-49C2-A7B9-118B468C09A0}"/>
+                <a16:creationId xmlns:a16="http://schemas.microsoft.com/office/drawing/2014/main" id="{8E7EF8AE-AAB2-4859-BF03-156BD1BF9159}"/>
               </a:ext>
             </a:extLst>
           </p:cNvPr>
@@ -5908,7 +5908,7 @@
           <p:cNvPr id="8" name="">
             <a:extLst xmlns:a="http://schemas.openxmlformats.org/drawingml/2006/main">
               <a:ext uri="{FF2B5EF4-FFF2-40B4-BE49-F238E27FC236}">
-                <a16:creationId xmlns:a16="http://schemas.microsoft.com/office/drawing/2014/main" id="{04C0F389-28CF-48E0-8C2B-71E6D3C65484}"/>
+                <a16:creationId xmlns:a16="http://schemas.microsoft.com/office/drawing/2014/main" id="{D509F439-D2E2-45C9-91CC-EAD8CFC3CDD3}"/>
               </a:ext>
             </a:extLst>
           </p:cNvPr>
@@ -5965,7 +5965,7 @@
           <p:cNvPr id="9" name="">
             <a:extLst xmlns:a="http://schemas.openxmlformats.org/drawingml/2006/main">
               <a:ext uri="{FF2B5EF4-FFF2-40B4-BE49-F238E27FC236}">
-                <a16:creationId xmlns:a16="http://schemas.microsoft.com/office/drawing/2014/main" id="{6A9FF070-2F3E-41BA-B40F-278C4D8F45E4}"/>
+                <a16:creationId xmlns:a16="http://schemas.microsoft.com/office/drawing/2014/main" id="{CD580CC9-B4C3-4BF3-8C4E-115F85DBAC6F}"/>
               </a:ext>
             </a:extLst>
           </p:cNvPr>
@@ -6022,7 +6022,7 @@
           <p:cNvPr id="10" name="">
             <a:extLst xmlns:a="http://schemas.openxmlformats.org/drawingml/2006/main">
               <a:ext uri="{FF2B5EF4-FFF2-40B4-BE49-F238E27FC236}">
-                <a16:creationId xmlns:a16="http://schemas.microsoft.com/office/drawing/2014/main" id="{E54810FC-C11C-40AE-8497-63510F6DD6DA}"/>
+                <a16:creationId xmlns:a16="http://schemas.microsoft.com/office/drawing/2014/main" id="{0DC81885-5CEF-408A-B9C7-33C721A6826E}"/>
               </a:ext>
             </a:extLst>
           </p:cNvPr>
@@ -6056,7 +6056,7 @@
           <p:cNvPr id="11" name="">
             <a:extLst xmlns:a="http://schemas.openxmlformats.org/drawingml/2006/main">
               <a:ext uri="{FF2B5EF4-FFF2-40B4-BE49-F238E27FC236}">
-                <a16:creationId xmlns:a16="http://schemas.microsoft.com/office/drawing/2014/main" id="{FFA2EB90-FE30-47AE-A3F6-E18AF9580291}"/>
+                <a16:creationId xmlns:a16="http://schemas.microsoft.com/office/drawing/2014/main" id="{680A0642-3362-4779-B3C3-C012FDDB861A}"/>
               </a:ext>
             </a:extLst>
           </p:cNvPr>
@@ -6088,7 +6088,7 @@
           <p:cNvPr id="12" name="">
             <a:extLst xmlns:a="http://schemas.openxmlformats.org/drawingml/2006/main">
               <a:ext uri="{FF2B5EF4-FFF2-40B4-BE49-F238E27FC236}">
-                <a16:creationId xmlns:a16="http://schemas.microsoft.com/office/drawing/2014/main" id="{A36FB861-0011-48CB-9880-510D6697AB6A}"/>
+                <a16:creationId xmlns:a16="http://schemas.microsoft.com/office/drawing/2014/main" id="{60E575C7-2C19-43C7-99EC-71249D3F13FA}"/>
               </a:ext>
             </a:extLst>
           </p:cNvPr>
@@ -6145,7 +6145,7 @@
           <p:cNvPr id="13" name="">
             <a:extLst xmlns:a="http://schemas.openxmlformats.org/drawingml/2006/main">
               <a:ext uri="{FF2B5EF4-FFF2-40B4-BE49-F238E27FC236}">
-                <a16:creationId xmlns:a16="http://schemas.microsoft.com/office/drawing/2014/main" id="{50A3B704-8195-4867-B67F-80F62D83A6FA}"/>
+                <a16:creationId xmlns:a16="http://schemas.microsoft.com/office/drawing/2014/main" id="{A62D08AA-73C6-4885-AF5F-C6E229DFE1FC}"/>
               </a:ext>
             </a:extLst>
           </p:cNvPr>
@@ -6202,7 +6202,7 @@
           <p:cNvPr id="14" name="">
             <a:extLst xmlns:a="http://schemas.openxmlformats.org/drawingml/2006/main">
               <a:ext uri="{FF2B5EF4-FFF2-40B4-BE49-F238E27FC236}">
-                <a16:creationId xmlns:a16="http://schemas.microsoft.com/office/drawing/2014/main" id="{30FE8BA2-8150-495A-AB87-5AB68254CF89}"/>
+                <a16:creationId xmlns:a16="http://schemas.microsoft.com/office/drawing/2014/main" id="{B43D8110-5CDD-4A4D-96FF-D021CDE4D482}"/>
               </a:ext>
             </a:extLst>
           </p:cNvPr>
@@ -6236,7 +6236,7 @@
           <p:cNvPr id="15" name="">
             <a:extLst xmlns:a="http://schemas.openxmlformats.org/drawingml/2006/main">
               <a:ext uri="{FF2B5EF4-FFF2-40B4-BE49-F238E27FC236}">
-                <a16:creationId xmlns:a16="http://schemas.microsoft.com/office/drawing/2014/main" id="{5A2456C7-DE1E-461F-94E0-73D8AF1D873F}"/>
+                <a16:creationId xmlns:a16="http://schemas.microsoft.com/office/drawing/2014/main" id="{CF6095F6-0881-4ACB-AA85-F8929FE61A37}"/>
               </a:ext>
             </a:extLst>
           </p:cNvPr>
@@ -6268,7 +6268,7 @@
           <p:cNvPr id="16" name="">
             <a:extLst xmlns:a="http://schemas.openxmlformats.org/drawingml/2006/main">
               <a:ext uri="{FF2B5EF4-FFF2-40B4-BE49-F238E27FC236}">
-                <a16:creationId xmlns:a16="http://schemas.microsoft.com/office/drawing/2014/main" id="{7B869F63-B0CC-471E-8862-8AFC314302E0}"/>
+                <a16:creationId xmlns:a16="http://schemas.microsoft.com/office/drawing/2014/main" id="{D1D69A66-573A-44E0-9E45-E650D8ED9926}"/>
               </a:ext>
             </a:extLst>
           </p:cNvPr>
@@ -6325,7 +6325,7 @@
           <p:cNvPr id="17" name="">
             <a:extLst xmlns:a="http://schemas.openxmlformats.org/drawingml/2006/main">
               <a:ext uri="{FF2B5EF4-FFF2-40B4-BE49-F238E27FC236}">
-                <a16:creationId xmlns:a16="http://schemas.microsoft.com/office/drawing/2014/main" id="{7A2FD1C2-3EE7-4EB9-9786-9BFFB30C4E3F}"/>
+                <a16:creationId xmlns:a16="http://schemas.microsoft.com/office/drawing/2014/main" id="{A41A19FA-1989-4293-8B37-4AAD873CAB1D}"/>
               </a:ext>
             </a:extLst>
           </p:cNvPr>
@@ -6382,7 +6382,7 @@
           <p:cNvPr id="18" name="">
             <a:extLst xmlns:a="http://schemas.openxmlformats.org/drawingml/2006/main">
               <a:ext uri="{FF2B5EF4-FFF2-40B4-BE49-F238E27FC236}">
-                <a16:creationId xmlns:a16="http://schemas.microsoft.com/office/drawing/2014/main" id="{D8B74EAB-D520-4484-929F-1AE8F0AC9E6E}"/>
+                <a16:creationId xmlns:a16="http://schemas.microsoft.com/office/drawing/2014/main" id="{373FB1D0-3FA7-4198-BD87-84B30E2B0C54}"/>
               </a:ext>
             </a:extLst>
           </p:cNvPr>
@@ -6416,7 +6416,7 @@
           <p:cNvPr id="19" name="">
             <a:extLst xmlns:a="http://schemas.openxmlformats.org/drawingml/2006/main">
               <a:ext uri="{FF2B5EF4-FFF2-40B4-BE49-F238E27FC236}">
-                <a16:creationId xmlns:a16="http://schemas.microsoft.com/office/drawing/2014/main" id="{14E191B1-8741-4F1E-BF2D-E3620B9CA795}"/>
+                <a16:creationId xmlns:a16="http://schemas.microsoft.com/office/drawing/2014/main" id="{A957EEFF-BA1D-443C-A7E3-5CF3D3746E30}"/>
               </a:ext>
             </a:extLst>
           </p:cNvPr>
@@ -6448,7 +6448,7 @@
           <p:cNvPr id="20" name="">
             <a:extLst xmlns:a="http://schemas.openxmlformats.org/drawingml/2006/main">
               <a:ext uri="{FF2B5EF4-FFF2-40B4-BE49-F238E27FC236}">
-                <a16:creationId xmlns:a16="http://schemas.microsoft.com/office/drawing/2014/main" id="{B4F1814F-80C5-4514-A8C4-18E0783FA18A}"/>
+                <a16:creationId xmlns:a16="http://schemas.microsoft.com/office/drawing/2014/main" id="{C218A050-EE3E-499D-A4F5-9FDCD03B4A14}"/>
               </a:ext>
             </a:extLst>
           </p:cNvPr>
@@ -6505,7 +6505,7 @@
           <p:cNvPr id="21" name="">
             <a:extLst xmlns:a="http://schemas.openxmlformats.org/drawingml/2006/main">
               <a:ext uri="{FF2B5EF4-FFF2-40B4-BE49-F238E27FC236}">
-                <a16:creationId xmlns:a16="http://schemas.microsoft.com/office/drawing/2014/main" id="{CD37DAB9-4301-49DA-91DB-451488A2FDAD}"/>
+                <a16:creationId xmlns:a16="http://schemas.microsoft.com/office/drawing/2014/main" id="{FF6C99BE-0050-4F0F-9638-BF7E0E6B0765}"/>
               </a:ext>
             </a:extLst>
           </p:cNvPr>
@@ -6562,7 +6562,7 @@
           <p:cNvPr id="22" name="">
             <a:extLst xmlns:a="http://schemas.openxmlformats.org/drawingml/2006/main">
               <a:ext uri="{FF2B5EF4-FFF2-40B4-BE49-F238E27FC236}">
-                <a16:creationId xmlns:a16="http://schemas.microsoft.com/office/drawing/2014/main" id="{BF647030-B935-46FD-9F12-DBF3ABFB812F}"/>
+                <a16:creationId xmlns:a16="http://schemas.microsoft.com/office/drawing/2014/main" id="{AF553F50-3FCD-4657-926B-738219FA2C31}"/>
               </a:ext>
             </a:extLst>
           </p:cNvPr>
@@ -6617,7 +6617,7 @@
     </p:spTree>
     <p:extLst>
       <p:ext uri="{BB962C8B-B14F-4D97-AF65-F5344CB8AC3E}">
-        <p14:creationId xmlns:p14="http://schemas.microsoft.com/office/powerpoint/2010/main" val="114139770"/>
+        <p14:creationId xmlns:p14="http://schemas.microsoft.com/office/powerpoint/2010/main" val="1810186960"/>
       </p:ext>
     </p:extLst>
   </p:cSld>
@@ -6818,7 +6818,7 @@
           <p:cNvPr id="16" name="">
             <a:extLst xmlns:a="http://schemas.openxmlformats.org/drawingml/2006/main">
               <a:ext uri="{FF2B5EF4-FFF2-40B4-BE49-F238E27FC236}">
-                <a16:creationId xmlns:a16="http://schemas.microsoft.com/office/drawing/2014/main" id="{F35F3A98-FBE5-4EC9-853F-74A993B00EFB}"/>
+                <a16:creationId xmlns:a16="http://schemas.microsoft.com/office/drawing/2014/main" id="{4C820FE3-E121-4007-8CFD-09C4D20BB212}"/>
               </a:ext>
             </a:extLst>
           </p:cNvPr>
@@ -6850,7 +6850,7 @@
           <p:cNvPr id="2" name="">
             <a:extLst xmlns:a="http://schemas.openxmlformats.org/drawingml/2006/main">
               <a:ext uri="{FF2B5EF4-FFF2-40B4-BE49-F238E27FC236}">
-                <a16:creationId xmlns:a16="http://schemas.microsoft.com/office/drawing/2014/main" id="{B81BA546-4A83-41BC-9EDB-BC8337BD577C}"/>
+                <a16:creationId xmlns:a16="http://schemas.microsoft.com/office/drawing/2014/main" id="{54537500-ED29-4EC8-A7D0-3A040367E7CF}"/>
               </a:ext>
             </a:extLst>
           </p:cNvPr>
@@ -6907,7 +6907,7 @@
           <p:cNvPr id="3" name="">
             <a:extLst xmlns:a="http://schemas.openxmlformats.org/drawingml/2006/main">
               <a:ext uri="{FF2B5EF4-FFF2-40B4-BE49-F238E27FC236}">
-                <a16:creationId xmlns:a16="http://schemas.microsoft.com/office/drawing/2014/main" id="{CBE177E4-0F41-49C4-B6F9-8DE3247F71F5}"/>
+                <a16:creationId xmlns:a16="http://schemas.microsoft.com/office/drawing/2014/main" id="{B4C8DBE5-F23C-46CA-849D-F713B577CE25}"/>
               </a:ext>
             </a:extLst>
           </p:cNvPr>
@@ -6939,7 +6939,7 @@
           <p:cNvPr id="4" name="">
             <a:extLst xmlns:a="http://schemas.openxmlformats.org/drawingml/2006/main">
               <a:ext uri="{FF2B5EF4-FFF2-40B4-BE49-F238E27FC236}">
-                <a16:creationId xmlns:a16="http://schemas.microsoft.com/office/drawing/2014/main" id="{25355D77-D8EA-486C-B1FF-DCD7805455D8}"/>
+                <a16:creationId xmlns:a16="http://schemas.microsoft.com/office/drawing/2014/main" id="{63D0600C-4263-4607-9D01-CB6EEC963019}"/>
               </a:ext>
             </a:extLst>
           </p:cNvPr>
@@ -6996,7 +6996,7 @@
           <p:cNvPr id="5" name="">
             <a:extLst xmlns:a="http://schemas.openxmlformats.org/drawingml/2006/main">
               <a:ext uri="{FF2B5EF4-FFF2-40B4-BE49-F238E27FC236}">
-                <a16:creationId xmlns:a16="http://schemas.microsoft.com/office/drawing/2014/main" id="{B681FF4C-ECB3-4688-9331-998D2B754F9F}"/>
+                <a16:creationId xmlns:a16="http://schemas.microsoft.com/office/drawing/2014/main" id="{9C57B1AC-06BE-4A26-A918-599237A90F04}"/>
               </a:ext>
             </a:extLst>
           </p:cNvPr>
@@ -7053,7 +7053,7 @@
           <p:cNvPr id="6" name="">
             <a:extLst xmlns:a="http://schemas.openxmlformats.org/drawingml/2006/main">
               <a:ext uri="{FF2B5EF4-FFF2-40B4-BE49-F238E27FC236}">
-                <a16:creationId xmlns:a16="http://schemas.microsoft.com/office/drawing/2014/main" id="{7D56B57B-C8F9-4546-B9DB-93BD2F5B1810}"/>
+                <a16:creationId xmlns:a16="http://schemas.microsoft.com/office/drawing/2014/main" id="{3C4676BF-32B1-480B-9085-1A2A5BC2530F}"/>
               </a:ext>
             </a:extLst>
           </p:cNvPr>
@@ -7110,7 +7110,7 @@
           <p:cNvPr id="7" name="">
             <a:extLst xmlns:a="http://schemas.openxmlformats.org/drawingml/2006/main">
               <a:ext uri="{FF2B5EF4-FFF2-40B4-BE49-F238E27FC236}">
-                <a16:creationId xmlns:a16="http://schemas.microsoft.com/office/drawing/2014/main" id="{5B9DA7BE-F820-4083-AFCC-FAAA4126466E}"/>
+                <a16:creationId xmlns:a16="http://schemas.microsoft.com/office/drawing/2014/main" id="{AF6E403F-B6BC-4BE4-B60B-2B52081B8A65}"/>
               </a:ext>
             </a:extLst>
           </p:cNvPr>
@@ -7142,7 +7142,7 @@
           <p:cNvPr id="8" name="">
             <a:extLst xmlns:a="http://schemas.openxmlformats.org/drawingml/2006/main">
               <a:ext uri="{FF2B5EF4-FFF2-40B4-BE49-F238E27FC236}">
-                <a16:creationId xmlns:a16="http://schemas.microsoft.com/office/drawing/2014/main" id="{22420658-5697-41BD-98A6-23E062A2B568}"/>
+                <a16:creationId xmlns:a16="http://schemas.microsoft.com/office/drawing/2014/main" id="{D1FBBEF8-3B86-45E7-8AE2-386E228B1D45}"/>
               </a:ext>
             </a:extLst>
           </p:cNvPr>
@@ -7199,7 +7199,7 @@
           <p:cNvPr id="9" name="">
             <a:extLst xmlns:a="http://schemas.openxmlformats.org/drawingml/2006/main">
               <a:ext uri="{FF2B5EF4-FFF2-40B4-BE49-F238E27FC236}">
-                <a16:creationId xmlns:a16="http://schemas.microsoft.com/office/drawing/2014/main" id="{56755F78-13B1-4524-80AE-813EE0B7E3B9}"/>
+                <a16:creationId xmlns:a16="http://schemas.microsoft.com/office/drawing/2014/main" id="{C4958204-F93C-46A8-8FF6-CA50FEDFBC87}"/>
               </a:ext>
             </a:extLst>
           </p:cNvPr>
@@ -7256,7 +7256,7 @@
           <p:cNvPr id="10" name="">
             <a:extLst xmlns:a="http://schemas.openxmlformats.org/drawingml/2006/main">
               <a:ext uri="{FF2B5EF4-FFF2-40B4-BE49-F238E27FC236}">
-                <a16:creationId xmlns:a16="http://schemas.microsoft.com/office/drawing/2014/main" id="{AA0C13CF-904F-433A-BEA5-BD671BF65904}"/>
+                <a16:creationId xmlns:a16="http://schemas.microsoft.com/office/drawing/2014/main" id="{8273DD5E-C8C3-4409-ADB4-C7B926F19BC0}"/>
               </a:ext>
             </a:extLst>
           </p:cNvPr>
@@ -7313,7 +7313,7 @@
           <p:cNvPr id="11" name="">
             <a:extLst xmlns:a="http://schemas.openxmlformats.org/drawingml/2006/main">
               <a:ext uri="{FF2B5EF4-FFF2-40B4-BE49-F238E27FC236}">
-                <a16:creationId xmlns:a16="http://schemas.microsoft.com/office/drawing/2014/main" id="{DECB8D04-4888-4627-B9C8-EBC8BE1C508E}"/>
+                <a16:creationId xmlns:a16="http://schemas.microsoft.com/office/drawing/2014/main" id="{AE06F6BC-E405-46B3-9C76-20AE22DA6F60}"/>
               </a:ext>
             </a:extLst>
           </p:cNvPr>
@@ -7345,7 +7345,7 @@
           <p:cNvPr id="12" name="">
             <a:extLst xmlns:a="http://schemas.openxmlformats.org/drawingml/2006/main">
               <a:ext uri="{FF2B5EF4-FFF2-40B4-BE49-F238E27FC236}">
-                <a16:creationId xmlns:a16="http://schemas.microsoft.com/office/drawing/2014/main" id="{69E0BDE1-E426-4455-A669-05C975FE2D79}"/>
+                <a16:creationId xmlns:a16="http://schemas.microsoft.com/office/drawing/2014/main" id="{40065F46-58F1-4A16-916F-04457C782CFF}"/>
               </a:ext>
             </a:extLst>
           </p:cNvPr>
@@ -7402,7 +7402,7 @@
           <p:cNvPr id="13" name="">
             <a:extLst xmlns:a="http://schemas.openxmlformats.org/drawingml/2006/main">
               <a:ext uri="{FF2B5EF4-FFF2-40B4-BE49-F238E27FC236}">
-                <a16:creationId xmlns:a16="http://schemas.microsoft.com/office/drawing/2014/main" id="{FC1B73E7-790F-4674-85C2-3636C910B897}"/>
+                <a16:creationId xmlns:a16="http://schemas.microsoft.com/office/drawing/2014/main" id="{D81D560C-D93F-4A29-A913-5805579D8648}"/>
               </a:ext>
             </a:extLst>
           </p:cNvPr>
@@ -7459,7 +7459,7 @@
           <p:cNvPr id="14" name="">
             <a:extLst xmlns:a="http://schemas.openxmlformats.org/drawingml/2006/main">
               <a:ext uri="{FF2B5EF4-FFF2-40B4-BE49-F238E27FC236}">
-                <a16:creationId xmlns:a16="http://schemas.microsoft.com/office/drawing/2014/main" id="{C6B6E5D4-C6BA-4431-9C12-BF23BCC282DD}"/>
+                <a16:creationId xmlns:a16="http://schemas.microsoft.com/office/drawing/2014/main" id="{A9C276D6-E29A-4B00-809C-1DF37F296B88}"/>
               </a:ext>
             </a:extLst>
           </p:cNvPr>
@@ -7516,7 +7516,7 @@
           <p:cNvPr id="15" name="">
             <a:extLst xmlns:a="http://schemas.openxmlformats.org/drawingml/2006/main">
               <a:ext uri="{FF2B5EF4-FFF2-40B4-BE49-F238E27FC236}">
-                <a16:creationId xmlns:a16="http://schemas.microsoft.com/office/drawing/2014/main" id="{F7DCD686-99BE-4B04-BA86-71A4E5BA16CC}"/>
+                <a16:creationId xmlns:a16="http://schemas.microsoft.com/office/drawing/2014/main" id="{412518E6-9113-4BB1-A545-6E200D4E9907}"/>
               </a:ext>
             </a:extLst>
           </p:cNvPr>
@@ -7571,7 +7571,7 @@
     </p:spTree>
     <p:extLst>
       <p:ext uri="{BB962C8B-B14F-4D97-AF65-F5344CB8AC3E}">
-        <p14:creationId xmlns:p14="http://schemas.microsoft.com/office/powerpoint/2010/main" val="8668340"/>
+        <p14:creationId xmlns:p14="http://schemas.microsoft.com/office/powerpoint/2010/main" val="885388762"/>
       </p:ext>
     </p:extLst>
   </p:cSld>
@@ -7772,7 +7772,7 @@
           <p:cNvPr id="23" name="">
             <a:extLst xmlns:a="http://schemas.openxmlformats.org/drawingml/2006/main">
               <a:ext uri="{FF2B5EF4-FFF2-40B4-BE49-F238E27FC236}">
-                <a16:creationId xmlns:a16="http://schemas.microsoft.com/office/drawing/2014/main" id="{81C0E999-921A-4805-9892-20EFD5359C1E}"/>
+                <a16:creationId xmlns:a16="http://schemas.microsoft.com/office/drawing/2014/main" id="{B47D7650-95C3-4FB3-A3EC-DBFDB7BEF777}"/>
               </a:ext>
             </a:extLst>
           </p:cNvPr>
@@ -7804,7 +7804,7 @@
           <p:cNvPr id="2" name="">
             <a:extLst xmlns:a="http://schemas.openxmlformats.org/drawingml/2006/main">
               <a:ext uri="{FF2B5EF4-FFF2-40B4-BE49-F238E27FC236}">
-                <a16:creationId xmlns:a16="http://schemas.microsoft.com/office/drawing/2014/main" id="{3D6BB252-D6D4-4994-A7A5-85BFAD36E327}"/>
+                <a16:creationId xmlns:a16="http://schemas.microsoft.com/office/drawing/2014/main" id="{0F7F52E4-64F2-4CFC-A0ED-A1563449587C}"/>
               </a:ext>
             </a:extLst>
           </p:cNvPr>
@@ -7861,7 +7861,7 @@
           <p:cNvPr id="3" name="">
             <a:extLst xmlns:a="http://schemas.openxmlformats.org/drawingml/2006/main">
               <a:ext uri="{FF2B5EF4-FFF2-40B4-BE49-F238E27FC236}">
-                <a16:creationId xmlns:a16="http://schemas.microsoft.com/office/drawing/2014/main" id="{900729E9-6C88-4453-BF12-00E80715B760}"/>
+                <a16:creationId xmlns:a16="http://schemas.microsoft.com/office/drawing/2014/main" id="{C8B95234-0172-4AA6-808F-47447F031BA6}"/>
               </a:ext>
             </a:extLst>
           </p:cNvPr>
@@ -7893,7 +7893,7 @@
           <p:cNvPr id="4" name="">
             <a:extLst xmlns:a="http://schemas.openxmlformats.org/drawingml/2006/main">
               <a:ext uri="{FF2B5EF4-FFF2-40B4-BE49-F238E27FC236}">
-                <a16:creationId xmlns:a16="http://schemas.microsoft.com/office/drawing/2014/main" id="{14A21E96-1632-49EB-92D0-7DB587F573D0}"/>
+                <a16:creationId xmlns:a16="http://schemas.microsoft.com/office/drawing/2014/main" id="{E2FD8CFA-B048-422D-9A1F-8849ADFA01F3}"/>
               </a:ext>
             </a:extLst>
           </p:cNvPr>
@@ -7950,7 +7950,7 @@
           <p:cNvPr id="5" name="">
             <a:extLst xmlns:a="http://schemas.openxmlformats.org/drawingml/2006/main">
               <a:ext uri="{FF2B5EF4-FFF2-40B4-BE49-F238E27FC236}">
-                <a16:creationId xmlns:a16="http://schemas.microsoft.com/office/drawing/2014/main" id="{2F521923-CC42-49D5-ABFD-DAB0D93928DE}"/>
+                <a16:creationId xmlns:a16="http://schemas.microsoft.com/office/drawing/2014/main" id="{267C1238-2D55-40E2-9665-2DFC08F688D7}"/>
               </a:ext>
             </a:extLst>
           </p:cNvPr>
@@ -8007,7 +8007,7 @@
           <p:cNvPr id="6" name="">
             <a:extLst xmlns:a="http://schemas.openxmlformats.org/drawingml/2006/main">
               <a:ext uri="{FF2B5EF4-FFF2-40B4-BE49-F238E27FC236}">
-                <a16:creationId xmlns:a16="http://schemas.microsoft.com/office/drawing/2014/main" id="{E27AA31C-41EC-4F6D-8679-A0F61568AE18}"/>
+                <a16:creationId xmlns:a16="http://schemas.microsoft.com/office/drawing/2014/main" id="{CE9C92FD-6252-4CEC-BA12-615C73CD204C}"/>
               </a:ext>
             </a:extLst>
           </p:cNvPr>
@@ -8064,7 +8064,7 @@
           <p:cNvPr id="7" name="">
             <a:extLst xmlns:a="http://schemas.openxmlformats.org/drawingml/2006/main">
               <a:ext uri="{FF2B5EF4-FFF2-40B4-BE49-F238E27FC236}">
-                <a16:creationId xmlns:a16="http://schemas.microsoft.com/office/drawing/2014/main" id="{6E699DF0-2D3C-4582-A19C-03B960016676}"/>
+                <a16:creationId xmlns:a16="http://schemas.microsoft.com/office/drawing/2014/main" id="{C5F697B9-67BA-4DB4-8843-214D663CED2C}"/>
               </a:ext>
             </a:extLst>
           </p:cNvPr>
@@ -8096,7 +8096,7 @@
           <p:cNvPr id="8" name="">
             <a:extLst xmlns:a="http://schemas.openxmlformats.org/drawingml/2006/main">
               <a:ext uri="{FF2B5EF4-FFF2-40B4-BE49-F238E27FC236}">
-                <a16:creationId xmlns:a16="http://schemas.microsoft.com/office/drawing/2014/main" id="{A2E272ED-DDA6-448C-83C8-949D84FC72CB}"/>
+                <a16:creationId xmlns:a16="http://schemas.microsoft.com/office/drawing/2014/main" id="{44D4825B-0002-413D-AEC1-CC1D88BEC61E}"/>
               </a:ext>
             </a:extLst>
           </p:cNvPr>
@@ -8153,7 +8153,7 @@
           <p:cNvPr id="9" name="">
             <a:extLst xmlns:a="http://schemas.openxmlformats.org/drawingml/2006/main">
               <a:ext uri="{FF2B5EF4-FFF2-40B4-BE49-F238E27FC236}">
-                <a16:creationId xmlns:a16="http://schemas.microsoft.com/office/drawing/2014/main" id="{9FE35372-4A44-4540-AD12-1399DDE65D60}"/>
+                <a16:creationId xmlns:a16="http://schemas.microsoft.com/office/drawing/2014/main" id="{DAE7F829-3CD8-41E6-8137-D8065621AE81}"/>
               </a:ext>
             </a:extLst>
           </p:cNvPr>
@@ -8210,19 +8210,19 @@
           <p:cNvPr id="10" name="">
             <a:extLst xmlns:a="http://schemas.openxmlformats.org/drawingml/2006/main">
               <a:ext uri="{FF2B5EF4-FFF2-40B4-BE49-F238E27FC236}">
-                <a16:creationId xmlns:a16="http://schemas.microsoft.com/office/drawing/2014/main" id="{D4E91033-6065-40F5-9802-601823BCF0E6}"/>
-              </a:ext>
-            </a:extLst>
-          </p:cNvPr>
-          <p:cNvSpPr>
-            <a:spLocks xmlns:a="http://schemas.openxmlformats.org/drawingml/2006/main" noGrp="1"/>
-          </p:cNvSpPr>
-          <p:nvPr/>
-        </p:nvSpPr>
-        <p:spPr>
-          <a:xfrm xmlns:a="http://schemas.openxmlformats.org/drawingml/2006/main">
-            <a:off x="914400" y="1257300"/>
-            <a:ext cx="10363200" cy="781050"/>
+                <a16:creationId xmlns:a16="http://schemas.microsoft.com/office/drawing/2014/main" id="{EE11A484-C38A-4F3F-BE8F-3CEEF47201B9}"/>
+              </a:ext>
+            </a:extLst>
+          </p:cNvPr>
+          <p:cNvSpPr>
+            <a:spLocks xmlns:a="http://schemas.openxmlformats.org/drawingml/2006/main" noGrp="1"/>
+          </p:cNvSpPr>
+          <p:nvPr/>
+        </p:nvSpPr>
+        <p:spPr>
+          <a:xfrm xmlns:a="http://schemas.openxmlformats.org/drawingml/2006/main">
+            <a:off x="857250" y="1219200"/>
+            <a:ext cx="10477500" cy="742950"/>
           </a:xfrm>
           <a:prstGeom xmlns:a="http://schemas.openxmlformats.org/drawingml/2006/main" prst="rect">
             <a:avLst/>
@@ -8239,7 +8239,7 @@
           <a:lstStyle xmlns:a="http://schemas.openxmlformats.org/drawingml/2006/main"/>
           <a:p xmlns:a="http://schemas.openxmlformats.org/drawingml/2006/main">
             <a:pPr algn="ctr">
-              <a:defRPr sz="2175" b="1">
+              <a:defRPr sz="2100" b="1">
                 <a:solidFill>
                   <a:srgbClr val="17253A"/>
                 </a:solidFill>
@@ -8249,7 +8249,7 @@
               </a:defRPr>
             </a:pPr>
             <a:r>
-              <a:rPr sz="2175" b="1">
+              <a:rPr sz="2100" b="1">
                 <a:solidFill>
                   <a:srgbClr val="17253A"/>
                 </a:solidFill>
@@ -8267,28 +8267,30 @@
           <p:cNvPr id="11" name="">
             <a:extLst xmlns:a="http://schemas.openxmlformats.org/drawingml/2006/main">
               <a:ext uri="{FF2B5EF4-FFF2-40B4-BE49-F238E27FC236}">
-                <a16:creationId xmlns:a16="http://schemas.microsoft.com/office/drawing/2014/main" id="{CB80E77F-0C46-4A07-9189-697E2D6E3A20}"/>
-              </a:ext>
-            </a:extLst>
-          </p:cNvPr>
-          <p:cNvSpPr>
-            <a:spLocks xmlns:a="http://schemas.openxmlformats.org/drawingml/2006/main" noGrp="1"/>
-          </p:cNvSpPr>
-          <p:nvPr/>
-        </p:nvSpPr>
-        <p:spPr>
-          <a:xfrm xmlns:a="http://schemas.openxmlformats.org/drawingml/2006/main">
-            <a:off x="1000125" y="2247900"/>
-            <a:ext cx="476250" cy="476250"/>
-          </a:xfrm>
-          <a:prstGeom xmlns:a="http://schemas.openxmlformats.org/drawingml/2006/main" prst="ellipse">
+                <a16:creationId xmlns:a16="http://schemas.microsoft.com/office/drawing/2014/main" id="{3167DB18-E18C-4DF6-AD50-BA217BE2D5A4}"/>
+              </a:ext>
+            </a:extLst>
+          </p:cNvPr>
+          <p:cNvSpPr>
+            <a:spLocks xmlns:a="http://schemas.openxmlformats.org/drawingml/2006/main" noGrp="1"/>
+          </p:cNvSpPr>
+          <p:nvPr/>
+        </p:nvSpPr>
+        <p:spPr>
+          <a:xfrm xmlns:a="http://schemas.openxmlformats.org/drawingml/2006/main">
+            <a:off x="971550" y="2124075"/>
+            <a:ext cx="38100" cy="3524250"/>
+          </a:xfrm>
+          <a:prstGeom xmlns:a="http://schemas.openxmlformats.org/drawingml/2006/main" prst="rect">
             <a:avLst/>
           </a:prstGeom>
           <a:solidFill xmlns:a="http://schemas.openxmlformats.org/drawingml/2006/main">
-            <a:srgbClr val="18324A"/>
+            <a:srgbClr val="2C6E73"/>
           </a:solidFill>
           <a:ln xmlns:a="http://schemas.openxmlformats.org/drawingml/2006/main" w="0">
-            <a:noFill/>
+            <a:solidFill>
+              <a:srgbClr val="2C6E73"/>
+            </a:solidFill>
           </a:ln>
         </p:spPr>
       </p:sp>
@@ -8297,19 +8299,19 @@
           <p:cNvPr id="12" name="">
             <a:extLst xmlns:a="http://schemas.openxmlformats.org/drawingml/2006/main">
               <a:ext uri="{FF2B5EF4-FFF2-40B4-BE49-F238E27FC236}">
-                <a16:creationId xmlns:a16="http://schemas.microsoft.com/office/drawing/2014/main" id="{CA3E02EA-B473-42FD-A8DF-1AB2A2A62191}"/>
-              </a:ext>
-            </a:extLst>
-          </p:cNvPr>
-          <p:cNvSpPr>
-            <a:spLocks xmlns:a="http://schemas.openxmlformats.org/drawingml/2006/main" noGrp="1"/>
-          </p:cNvSpPr>
-          <p:nvPr/>
-        </p:nvSpPr>
-        <p:spPr>
-          <a:xfrm xmlns:a="http://schemas.openxmlformats.org/drawingml/2006/main">
-            <a:off x="1000125" y="2276475"/>
-            <a:ext cx="476250" cy="419100"/>
+                <a16:creationId xmlns:a16="http://schemas.microsoft.com/office/drawing/2014/main" id="{79622C33-C5AB-4C8F-A461-1A2261913EFB}"/>
+              </a:ext>
+            </a:extLst>
+          </p:cNvPr>
+          <p:cNvSpPr>
+            <a:spLocks xmlns:a="http://schemas.openxmlformats.org/drawingml/2006/main" noGrp="1"/>
+          </p:cNvSpPr>
+          <p:nvPr/>
+        </p:nvSpPr>
+        <p:spPr>
+          <a:xfrm xmlns:a="http://schemas.openxmlformats.org/drawingml/2006/main">
+            <a:off x="1162050" y="2200275"/>
+            <a:ext cx="400050" cy="400050"/>
           </a:xfrm>
           <a:prstGeom xmlns:a="http://schemas.openxmlformats.org/drawingml/2006/main" prst="rect">
             <a:avLst/>
@@ -8326,9 +8328,9 @@
           <a:lstStyle xmlns:a="http://schemas.openxmlformats.org/drawingml/2006/main"/>
           <a:p xmlns:a="http://schemas.openxmlformats.org/drawingml/2006/main">
             <a:pPr algn="ctr">
-              <a:defRPr sz="1350" b="1">
-                <a:solidFill>
-                  <a:srgbClr val="FFFFFF"/>
+              <a:defRPr sz="1125" b="1">
+                <a:solidFill>
+                  <a:srgbClr val="2C6E73"/>
                 </a:solidFill>
                 <a:latin typeface="Arial"/>
                 <a:ea typeface="Arial"/>
@@ -8336,9 +8338,9 @@
               </a:defRPr>
             </a:pPr>
             <a:r>
-              <a:rPr sz="1350" b="1">
-                <a:solidFill>
-                  <a:srgbClr val="FFFFFF"/>
+              <a:rPr sz="1125" b="1">
+                <a:solidFill>
+                  <a:srgbClr val="2C6E73"/>
                 </a:solidFill>
                 <a:latin typeface="Arial"/>
                 <a:ea typeface="Arial"/>
@@ -8354,19 +8356,19 @@
           <p:cNvPr id="13" name="">
             <a:extLst xmlns:a="http://schemas.openxmlformats.org/drawingml/2006/main">
               <a:ext uri="{FF2B5EF4-FFF2-40B4-BE49-F238E27FC236}">
-                <a16:creationId xmlns:a16="http://schemas.microsoft.com/office/drawing/2014/main" id="{BAE09136-0C30-41A0-A5E4-4B74D63EDF97}"/>
-              </a:ext>
-            </a:extLst>
-          </p:cNvPr>
-          <p:cNvSpPr>
-            <a:spLocks xmlns:a="http://schemas.openxmlformats.org/drawingml/2006/main" noGrp="1"/>
-          </p:cNvSpPr>
-          <p:nvPr/>
-        </p:nvSpPr>
-        <p:spPr>
-          <a:xfrm xmlns:a="http://schemas.openxmlformats.org/drawingml/2006/main">
-            <a:off x="1714500" y="2181225"/>
-            <a:ext cx="9429750" cy="609600"/>
+                <a16:creationId xmlns:a16="http://schemas.microsoft.com/office/drawing/2014/main" id="{F6A154E3-FB17-4CFA-8DD4-9AEB7ED6B51C}"/>
+              </a:ext>
+            </a:extLst>
+          </p:cNvPr>
+          <p:cNvSpPr>
+            <a:spLocks xmlns:a="http://schemas.openxmlformats.org/drawingml/2006/main" noGrp="1"/>
+          </p:cNvSpPr>
+          <p:nvPr/>
+        </p:nvSpPr>
+        <p:spPr>
+          <a:xfrm xmlns:a="http://schemas.openxmlformats.org/drawingml/2006/main">
+            <a:off x="1714500" y="2114550"/>
+            <a:ext cx="9525000" cy="809625"/>
           </a:xfrm>
           <a:prstGeom xmlns:a="http://schemas.openxmlformats.org/drawingml/2006/main" prst="rect">
             <a:avLst/>
@@ -8383,7 +8385,7 @@
           <a:lstStyle xmlns:a="http://schemas.openxmlformats.org/drawingml/2006/main"/>
           <a:p xmlns:a="http://schemas.openxmlformats.org/drawingml/2006/main">
             <a:pPr algn="l">
-              <a:defRPr sz="1500" b="0">
+              <a:defRPr sz="1725" b="0">
                 <a:solidFill>
                   <a:srgbClr val="17253A"/>
                 </a:solidFill>
@@ -8393,7 +8395,7 @@
               </a:defRPr>
             </a:pPr>
             <a:r>
-              <a:rPr sz="1500" b="0">
+              <a:rPr sz="1725" b="0">
                 <a:solidFill>
                   <a:srgbClr val="17253A"/>
                 </a:solidFill>
@@ -8401,7 +8403,7 @@
                 <a:ea typeface="Arial"/>
                 <a:cs typeface="Arial"/>
               </a:rPr>
-              <a:t>Identify the structure: Represent the fraction as equal parts or use an equivalent multiplication.</a:t>
+              <a:t>3/4 ÷ 2</a:t>
             </a:r>
           </a:p>
         </p:txBody>
@@ -8411,28 +8413,30 @@
           <p:cNvPr id="14" name="">
             <a:extLst xmlns:a="http://schemas.openxmlformats.org/drawingml/2006/main">
               <a:ext uri="{FF2B5EF4-FFF2-40B4-BE49-F238E27FC236}">
-                <a16:creationId xmlns:a16="http://schemas.microsoft.com/office/drawing/2014/main" id="{3A29790F-3284-4632-AEC8-EB6D43C52F70}"/>
-              </a:ext>
-            </a:extLst>
-          </p:cNvPr>
-          <p:cNvSpPr>
-            <a:spLocks xmlns:a="http://schemas.openxmlformats.org/drawingml/2006/main" noGrp="1"/>
-          </p:cNvSpPr>
-          <p:nvPr/>
-        </p:nvSpPr>
-        <p:spPr>
-          <a:xfrm xmlns:a="http://schemas.openxmlformats.org/drawingml/2006/main">
-            <a:off x="1000125" y="2990850"/>
-            <a:ext cx="476250" cy="476250"/>
-          </a:xfrm>
-          <a:prstGeom xmlns:a="http://schemas.openxmlformats.org/drawingml/2006/main" prst="ellipse">
+                <a16:creationId xmlns:a16="http://schemas.microsoft.com/office/drawing/2014/main" id="{926418E7-AA2A-45AE-8311-61A3DE22A239}"/>
+              </a:ext>
+            </a:extLst>
+          </p:cNvPr>
+          <p:cNvSpPr>
+            <a:spLocks xmlns:a="http://schemas.openxmlformats.org/drawingml/2006/main" noGrp="1"/>
+          </p:cNvSpPr>
+          <p:nvPr/>
+        </p:nvSpPr>
+        <p:spPr>
+          <a:xfrm xmlns:a="http://schemas.openxmlformats.org/drawingml/2006/main">
+            <a:off x="1714500" y="2943225"/>
+            <a:ext cx="9334500" cy="9525"/>
+          </a:xfrm>
+          <a:prstGeom xmlns:a="http://schemas.openxmlformats.org/drawingml/2006/main" prst="rect">
             <a:avLst/>
           </a:prstGeom>
           <a:solidFill xmlns:a="http://schemas.openxmlformats.org/drawingml/2006/main">
-            <a:srgbClr val="2C6E73"/>
+            <a:srgbClr val="D9E0E6"/>
           </a:solidFill>
           <a:ln xmlns:a="http://schemas.openxmlformats.org/drawingml/2006/main" w="0">
-            <a:noFill/>
+            <a:solidFill>
+              <a:srgbClr val="D9E0E6"/>
+            </a:solidFill>
           </a:ln>
         </p:spPr>
       </p:sp>
@@ -8441,19 +8445,19 @@
           <p:cNvPr id="15" name="">
             <a:extLst xmlns:a="http://schemas.openxmlformats.org/drawingml/2006/main">
               <a:ext uri="{FF2B5EF4-FFF2-40B4-BE49-F238E27FC236}">
-                <a16:creationId xmlns:a16="http://schemas.microsoft.com/office/drawing/2014/main" id="{E8A2B7D0-1929-4E07-A21D-CB86265440F8}"/>
-              </a:ext>
-            </a:extLst>
-          </p:cNvPr>
-          <p:cNvSpPr>
-            <a:spLocks xmlns:a="http://schemas.openxmlformats.org/drawingml/2006/main" noGrp="1"/>
-          </p:cNvSpPr>
-          <p:nvPr/>
-        </p:nvSpPr>
-        <p:spPr>
-          <a:xfrm xmlns:a="http://schemas.openxmlformats.org/drawingml/2006/main">
-            <a:off x="1000125" y="3019425"/>
-            <a:ext cx="476250" cy="419100"/>
+                <a16:creationId xmlns:a16="http://schemas.microsoft.com/office/drawing/2014/main" id="{10AE0D73-BEC1-4B9E-97E1-FDB14BE1B52E}"/>
+              </a:ext>
+            </a:extLst>
+          </p:cNvPr>
+          <p:cNvSpPr>
+            <a:spLocks xmlns:a="http://schemas.openxmlformats.org/drawingml/2006/main" noGrp="1"/>
+          </p:cNvSpPr>
+          <p:nvPr/>
+        </p:nvSpPr>
+        <p:spPr>
+          <a:xfrm xmlns:a="http://schemas.openxmlformats.org/drawingml/2006/main">
+            <a:off x="1162050" y="3076575"/>
+            <a:ext cx="400050" cy="400050"/>
           </a:xfrm>
           <a:prstGeom xmlns:a="http://schemas.openxmlformats.org/drawingml/2006/main" prst="rect">
             <a:avLst/>
@@ -8470,9 +8474,9 @@
           <a:lstStyle xmlns:a="http://schemas.openxmlformats.org/drawingml/2006/main"/>
           <a:p xmlns:a="http://schemas.openxmlformats.org/drawingml/2006/main">
             <a:pPr algn="ctr">
-              <a:defRPr sz="1350" b="1">
-                <a:solidFill>
-                  <a:srgbClr val="FFFFFF"/>
+              <a:defRPr sz="1125" b="1">
+                <a:solidFill>
+                  <a:srgbClr val="2C6E73"/>
                 </a:solidFill>
                 <a:latin typeface="Arial"/>
                 <a:ea typeface="Arial"/>
@@ -8480,9 +8484,9 @@
               </a:defRPr>
             </a:pPr>
             <a:r>
-              <a:rPr sz="1350" b="1">
-                <a:solidFill>
-                  <a:srgbClr val="FFFFFF"/>
+              <a:rPr sz="1125" b="1">
+                <a:solidFill>
+                  <a:srgbClr val="2C6E73"/>
                 </a:solidFill>
                 <a:latin typeface="Arial"/>
                 <a:ea typeface="Arial"/>
@@ -8498,19 +8502,19 @@
           <p:cNvPr id="16" name="">
             <a:extLst xmlns:a="http://schemas.openxmlformats.org/drawingml/2006/main">
               <a:ext uri="{FF2B5EF4-FFF2-40B4-BE49-F238E27FC236}">
-                <a16:creationId xmlns:a16="http://schemas.microsoft.com/office/drawing/2014/main" id="{BA50C3E6-16CD-43B4-9D4F-CA844789BFE4}"/>
-              </a:ext>
-            </a:extLst>
-          </p:cNvPr>
-          <p:cNvSpPr>
-            <a:spLocks xmlns:a="http://schemas.openxmlformats.org/drawingml/2006/main" noGrp="1"/>
-          </p:cNvSpPr>
-          <p:nvPr/>
-        </p:nvSpPr>
-        <p:spPr>
-          <a:xfrm xmlns:a="http://schemas.openxmlformats.org/drawingml/2006/main">
-            <a:off x="1714500" y="2924175"/>
-            <a:ext cx="9429750" cy="609600"/>
+                <a16:creationId xmlns:a16="http://schemas.microsoft.com/office/drawing/2014/main" id="{5CD31A9C-6CE6-4023-A65D-E04A9FF88FA6}"/>
+              </a:ext>
+            </a:extLst>
+          </p:cNvPr>
+          <p:cNvSpPr>
+            <a:spLocks xmlns:a="http://schemas.openxmlformats.org/drawingml/2006/main" noGrp="1"/>
+          </p:cNvSpPr>
+          <p:nvPr/>
+        </p:nvSpPr>
+        <p:spPr>
+          <a:xfrm xmlns:a="http://schemas.openxmlformats.org/drawingml/2006/main">
+            <a:off x="1714500" y="2990850"/>
+            <a:ext cx="9525000" cy="809625"/>
           </a:xfrm>
           <a:prstGeom xmlns:a="http://schemas.openxmlformats.org/drawingml/2006/main" prst="rect">
             <a:avLst/>
@@ -8527,7 +8531,7 @@
           <a:lstStyle xmlns:a="http://schemas.openxmlformats.org/drawingml/2006/main"/>
           <a:p xmlns:a="http://schemas.openxmlformats.org/drawingml/2006/main">
             <a:pPr algn="l">
-              <a:defRPr sz="1500" b="0">
+              <a:defRPr sz="1725" b="0">
                 <a:solidFill>
                   <a:srgbClr val="17253A"/>
                 </a:solidFill>
@@ -8537,7 +8541,7 @@
               </a:defRPr>
             </a:pPr>
             <a:r>
-              <a:rPr sz="1500" b="0">
+              <a:rPr sz="1725" b="0">
                 <a:solidFill>
                   <a:srgbClr val="17253A"/>
                 </a:solidFill>
@@ -8545,7 +8549,7 @@
                 <a:ea typeface="Arial"/>
                 <a:cs typeface="Arial"/>
               </a:rPr>
-              <a:t>Set up the method: Divide the numerator when possible or multiply the denominator by the whole number.</a:t>
+              <a:t>Dividing by 2 means multiply by 1/2</a:t>
             </a:r>
           </a:p>
         </p:txBody>
@@ -8555,28 +8559,30 @@
           <p:cNvPr id="17" name="">
             <a:extLst xmlns:a="http://schemas.openxmlformats.org/drawingml/2006/main">
               <a:ext uri="{FF2B5EF4-FFF2-40B4-BE49-F238E27FC236}">
-                <a16:creationId xmlns:a16="http://schemas.microsoft.com/office/drawing/2014/main" id="{F590E11F-C020-4DF5-9D6E-72CA669EC820}"/>
-              </a:ext>
-            </a:extLst>
-          </p:cNvPr>
-          <p:cNvSpPr>
-            <a:spLocks xmlns:a="http://schemas.openxmlformats.org/drawingml/2006/main" noGrp="1"/>
-          </p:cNvSpPr>
-          <p:nvPr/>
-        </p:nvSpPr>
-        <p:spPr>
-          <a:xfrm xmlns:a="http://schemas.openxmlformats.org/drawingml/2006/main">
-            <a:off x="1000125" y="3733800"/>
-            <a:ext cx="476250" cy="476250"/>
-          </a:xfrm>
-          <a:prstGeom xmlns:a="http://schemas.openxmlformats.org/drawingml/2006/main" prst="ellipse">
+                <a16:creationId xmlns:a16="http://schemas.microsoft.com/office/drawing/2014/main" id="{4EB0AFEB-9C8E-4C13-9653-54CB28DBC741}"/>
+              </a:ext>
+            </a:extLst>
+          </p:cNvPr>
+          <p:cNvSpPr>
+            <a:spLocks xmlns:a="http://schemas.openxmlformats.org/drawingml/2006/main" noGrp="1"/>
+          </p:cNvSpPr>
+          <p:nvPr/>
+        </p:nvSpPr>
+        <p:spPr>
+          <a:xfrm xmlns:a="http://schemas.openxmlformats.org/drawingml/2006/main">
+            <a:off x="1714500" y="3819525"/>
+            <a:ext cx="9334500" cy="9525"/>
+          </a:xfrm>
+          <a:prstGeom xmlns:a="http://schemas.openxmlformats.org/drawingml/2006/main" prst="rect">
             <a:avLst/>
           </a:prstGeom>
           <a:solidFill xmlns:a="http://schemas.openxmlformats.org/drawingml/2006/main">
-            <a:srgbClr val="2C6E73"/>
+            <a:srgbClr val="D9E0E6"/>
           </a:solidFill>
           <a:ln xmlns:a="http://schemas.openxmlformats.org/drawingml/2006/main" w="0">
-            <a:noFill/>
+            <a:solidFill>
+              <a:srgbClr val="D9E0E6"/>
+            </a:solidFill>
           </a:ln>
         </p:spPr>
       </p:sp>
@@ -8585,19 +8591,19 @@
           <p:cNvPr id="18" name="">
             <a:extLst xmlns:a="http://schemas.openxmlformats.org/drawingml/2006/main">
               <a:ext uri="{FF2B5EF4-FFF2-40B4-BE49-F238E27FC236}">
-                <a16:creationId xmlns:a16="http://schemas.microsoft.com/office/drawing/2014/main" id="{2F7E558D-0693-46C7-96B7-547CAFDF8516}"/>
-              </a:ext>
-            </a:extLst>
-          </p:cNvPr>
-          <p:cNvSpPr>
-            <a:spLocks xmlns:a="http://schemas.openxmlformats.org/drawingml/2006/main" noGrp="1"/>
-          </p:cNvSpPr>
-          <p:nvPr/>
-        </p:nvSpPr>
-        <p:spPr>
-          <a:xfrm xmlns:a="http://schemas.openxmlformats.org/drawingml/2006/main">
-            <a:off x="1000125" y="3762375"/>
-            <a:ext cx="476250" cy="419100"/>
+                <a16:creationId xmlns:a16="http://schemas.microsoft.com/office/drawing/2014/main" id="{59F1F8D2-6AE1-4EE7-991C-9401C81C309D}"/>
+              </a:ext>
+            </a:extLst>
+          </p:cNvPr>
+          <p:cNvSpPr>
+            <a:spLocks xmlns:a="http://schemas.openxmlformats.org/drawingml/2006/main" noGrp="1"/>
+          </p:cNvSpPr>
+          <p:nvPr/>
+        </p:nvSpPr>
+        <p:spPr>
+          <a:xfrm xmlns:a="http://schemas.openxmlformats.org/drawingml/2006/main">
+            <a:off x="1162050" y="3952875"/>
+            <a:ext cx="400050" cy="400050"/>
           </a:xfrm>
           <a:prstGeom xmlns:a="http://schemas.openxmlformats.org/drawingml/2006/main" prst="rect">
             <a:avLst/>
@@ -8614,9 +8620,9 @@
           <a:lstStyle xmlns:a="http://schemas.openxmlformats.org/drawingml/2006/main"/>
           <a:p xmlns:a="http://schemas.openxmlformats.org/drawingml/2006/main">
             <a:pPr algn="ctr">
-              <a:defRPr sz="1350" b="1">
-                <a:solidFill>
-                  <a:srgbClr val="FFFFFF"/>
+              <a:defRPr sz="1125" b="1">
+                <a:solidFill>
+                  <a:srgbClr val="2C6E73"/>
                 </a:solidFill>
                 <a:latin typeface="Arial"/>
                 <a:ea typeface="Arial"/>
@@ -8624,9 +8630,9 @@
               </a:defRPr>
             </a:pPr>
             <a:r>
-              <a:rPr sz="1350" b="1">
-                <a:solidFill>
-                  <a:srgbClr val="FFFFFF"/>
+              <a:rPr sz="1125" b="1">
+                <a:solidFill>
+                  <a:srgbClr val="2C6E73"/>
                 </a:solidFill>
                 <a:latin typeface="Arial"/>
                 <a:ea typeface="Arial"/>
@@ -8642,19 +8648,19 @@
           <p:cNvPr id="19" name="">
             <a:extLst xmlns:a="http://schemas.openxmlformats.org/drawingml/2006/main">
               <a:ext uri="{FF2B5EF4-FFF2-40B4-BE49-F238E27FC236}">
-                <a16:creationId xmlns:a16="http://schemas.microsoft.com/office/drawing/2014/main" id="{7AFCDE04-57CE-4CA4-97BD-FD54231E05E9}"/>
-              </a:ext>
-            </a:extLst>
-          </p:cNvPr>
-          <p:cNvSpPr>
-            <a:spLocks xmlns:a="http://schemas.openxmlformats.org/drawingml/2006/main" noGrp="1"/>
-          </p:cNvSpPr>
-          <p:nvPr/>
-        </p:nvSpPr>
-        <p:spPr>
-          <a:xfrm xmlns:a="http://schemas.openxmlformats.org/drawingml/2006/main">
-            <a:off x="1714500" y="3667125"/>
-            <a:ext cx="9429750" cy="609600"/>
+                <a16:creationId xmlns:a16="http://schemas.microsoft.com/office/drawing/2014/main" id="{5224937C-7F67-477C-957C-0A371376474E}"/>
+              </a:ext>
+            </a:extLst>
+          </p:cNvPr>
+          <p:cNvSpPr>
+            <a:spLocks xmlns:a="http://schemas.openxmlformats.org/drawingml/2006/main" noGrp="1"/>
+          </p:cNvSpPr>
+          <p:nvPr/>
+        </p:nvSpPr>
+        <p:spPr>
+          <a:xfrm xmlns:a="http://schemas.openxmlformats.org/drawingml/2006/main">
+            <a:off x="1714500" y="3867150"/>
+            <a:ext cx="9525000" cy="809625"/>
           </a:xfrm>
           <a:prstGeom xmlns:a="http://schemas.openxmlformats.org/drawingml/2006/main" prst="rect">
             <a:avLst/>
@@ -8671,7 +8677,7 @@
           <a:lstStyle xmlns:a="http://schemas.openxmlformats.org/drawingml/2006/main"/>
           <a:p xmlns:a="http://schemas.openxmlformats.org/drawingml/2006/main">
             <a:pPr algn="l">
-              <a:defRPr sz="1500" b="0">
+              <a:defRPr sz="1725" b="0">
                 <a:solidFill>
                   <a:srgbClr val="17253A"/>
                 </a:solidFill>
@@ -8681,7 +8687,7 @@
               </a:defRPr>
             </a:pPr>
             <a:r>
-              <a:rPr sz="1500" b="0">
+              <a:rPr sz="1725" b="0">
                 <a:solidFill>
                   <a:srgbClr val="17253A"/>
                 </a:solidFill>
@@ -8689,7 +8695,7 @@
                 <a:ea typeface="Arial"/>
                 <a:cs typeface="Arial"/>
               </a:rPr>
-              <a:t>Complete the calculation: 3/8.</a:t>
+              <a:t>3/4 × 1/2</a:t>
             </a:r>
           </a:p>
         </p:txBody>
@@ -8699,28 +8705,30 @@
           <p:cNvPr id="20" name="">
             <a:extLst xmlns:a="http://schemas.openxmlformats.org/drawingml/2006/main">
               <a:ext uri="{FF2B5EF4-FFF2-40B4-BE49-F238E27FC236}">
-                <a16:creationId xmlns:a16="http://schemas.microsoft.com/office/drawing/2014/main" id="{5ED1EB4A-34EB-49DB-9E4E-BA3CDF9AC423}"/>
-              </a:ext>
-            </a:extLst>
-          </p:cNvPr>
-          <p:cNvSpPr>
-            <a:spLocks xmlns:a="http://schemas.openxmlformats.org/drawingml/2006/main" noGrp="1"/>
-          </p:cNvSpPr>
-          <p:nvPr/>
-        </p:nvSpPr>
-        <p:spPr>
-          <a:xfrm xmlns:a="http://schemas.openxmlformats.org/drawingml/2006/main">
-            <a:off x="1000125" y="4476750"/>
-            <a:ext cx="476250" cy="476250"/>
-          </a:xfrm>
-          <a:prstGeom xmlns:a="http://schemas.openxmlformats.org/drawingml/2006/main" prst="ellipse">
+                <a16:creationId xmlns:a16="http://schemas.microsoft.com/office/drawing/2014/main" id="{5FED669A-D358-4A2A-BFA9-37FA03F29854}"/>
+              </a:ext>
+            </a:extLst>
+          </p:cNvPr>
+          <p:cNvSpPr>
+            <a:spLocks xmlns:a="http://schemas.openxmlformats.org/drawingml/2006/main" noGrp="1"/>
+          </p:cNvSpPr>
+          <p:nvPr/>
+        </p:nvSpPr>
+        <p:spPr>
+          <a:xfrm xmlns:a="http://schemas.openxmlformats.org/drawingml/2006/main">
+            <a:off x="1714500" y="4695825"/>
+            <a:ext cx="9334500" cy="9525"/>
+          </a:xfrm>
+          <a:prstGeom xmlns:a="http://schemas.openxmlformats.org/drawingml/2006/main" prst="rect">
             <a:avLst/>
           </a:prstGeom>
           <a:solidFill xmlns:a="http://schemas.openxmlformats.org/drawingml/2006/main">
-            <a:srgbClr val="2C6E73"/>
+            <a:srgbClr val="D9E0E6"/>
           </a:solidFill>
           <a:ln xmlns:a="http://schemas.openxmlformats.org/drawingml/2006/main" w="0">
-            <a:noFill/>
+            <a:solidFill>
+              <a:srgbClr val="D9E0E6"/>
+            </a:solidFill>
           </a:ln>
         </p:spPr>
       </p:sp>
@@ -8729,19 +8737,19 @@
           <p:cNvPr id="21" name="">
             <a:extLst xmlns:a="http://schemas.openxmlformats.org/drawingml/2006/main">
               <a:ext uri="{FF2B5EF4-FFF2-40B4-BE49-F238E27FC236}">
-                <a16:creationId xmlns:a16="http://schemas.microsoft.com/office/drawing/2014/main" id="{0266A1E4-63DA-4611-A869-F060108D65A7}"/>
-              </a:ext>
-            </a:extLst>
-          </p:cNvPr>
-          <p:cNvSpPr>
-            <a:spLocks xmlns:a="http://schemas.openxmlformats.org/drawingml/2006/main" noGrp="1"/>
-          </p:cNvSpPr>
-          <p:nvPr/>
-        </p:nvSpPr>
-        <p:spPr>
-          <a:xfrm xmlns:a="http://schemas.openxmlformats.org/drawingml/2006/main">
-            <a:off x="1000125" y="4505325"/>
-            <a:ext cx="476250" cy="419100"/>
+                <a16:creationId xmlns:a16="http://schemas.microsoft.com/office/drawing/2014/main" id="{D0876833-36E6-4C99-8A38-3BA7116A54B7}"/>
+              </a:ext>
+            </a:extLst>
+          </p:cNvPr>
+          <p:cNvSpPr>
+            <a:spLocks xmlns:a="http://schemas.openxmlformats.org/drawingml/2006/main" noGrp="1"/>
+          </p:cNvSpPr>
+          <p:nvPr/>
+        </p:nvSpPr>
+        <p:spPr>
+          <a:xfrm xmlns:a="http://schemas.openxmlformats.org/drawingml/2006/main">
+            <a:off x="1162050" y="4829175"/>
+            <a:ext cx="400050" cy="400050"/>
           </a:xfrm>
           <a:prstGeom xmlns:a="http://schemas.openxmlformats.org/drawingml/2006/main" prst="rect">
             <a:avLst/>
@@ -8758,9 +8766,9 @@
           <a:lstStyle xmlns:a="http://schemas.openxmlformats.org/drawingml/2006/main"/>
           <a:p xmlns:a="http://schemas.openxmlformats.org/drawingml/2006/main">
             <a:pPr algn="ctr">
-              <a:defRPr sz="1350" b="1">
-                <a:solidFill>
-                  <a:srgbClr val="FFFFFF"/>
+              <a:defRPr sz="1125" b="1">
+                <a:solidFill>
+                  <a:srgbClr val="2F785D"/>
                 </a:solidFill>
                 <a:latin typeface="Arial"/>
                 <a:ea typeface="Arial"/>
@@ -8768,9 +8776,9 @@
               </a:defRPr>
             </a:pPr>
             <a:r>
-              <a:rPr sz="1350" b="1">
-                <a:solidFill>
-                  <a:srgbClr val="FFFFFF"/>
+              <a:rPr sz="1125" b="1">
+                <a:solidFill>
+                  <a:srgbClr val="2F785D"/>
                 </a:solidFill>
                 <a:latin typeface="Arial"/>
                 <a:ea typeface="Arial"/>
@@ -8786,19 +8794,19 @@
           <p:cNvPr id="22" name="">
             <a:extLst xmlns:a="http://schemas.openxmlformats.org/drawingml/2006/main">
               <a:ext uri="{FF2B5EF4-FFF2-40B4-BE49-F238E27FC236}">
-                <a16:creationId xmlns:a16="http://schemas.microsoft.com/office/drawing/2014/main" id="{CBD13279-D20E-42C0-B41A-981F6C79CA05}"/>
-              </a:ext>
-            </a:extLst>
-          </p:cNvPr>
-          <p:cNvSpPr>
-            <a:spLocks xmlns:a="http://schemas.openxmlformats.org/drawingml/2006/main" noGrp="1"/>
-          </p:cNvSpPr>
-          <p:nvPr/>
-        </p:nvSpPr>
-        <p:spPr>
-          <a:xfrm xmlns:a="http://schemas.openxmlformats.org/drawingml/2006/main">
-            <a:off x="1714500" y="4410075"/>
-            <a:ext cx="9429750" cy="609600"/>
+                <a16:creationId xmlns:a16="http://schemas.microsoft.com/office/drawing/2014/main" id="{2621A0F8-A15E-42D1-9329-2412B3ABAE9D}"/>
+              </a:ext>
+            </a:extLst>
+          </p:cNvPr>
+          <p:cNvSpPr>
+            <a:spLocks xmlns:a="http://schemas.openxmlformats.org/drawingml/2006/main" noGrp="1"/>
+          </p:cNvSpPr>
+          <p:nvPr/>
+        </p:nvSpPr>
+        <p:spPr>
+          <a:xfrm xmlns:a="http://schemas.openxmlformats.org/drawingml/2006/main">
+            <a:off x="1714500" y="4743450"/>
+            <a:ext cx="9525000" cy="809625"/>
           </a:xfrm>
           <a:prstGeom xmlns:a="http://schemas.openxmlformats.org/drawingml/2006/main" prst="rect">
             <a:avLst/>
@@ -8815,7 +8823,7 @@
           <a:lstStyle xmlns:a="http://schemas.openxmlformats.org/drawingml/2006/main"/>
           <a:p xmlns:a="http://schemas.openxmlformats.org/drawingml/2006/main">
             <a:pPr algn="l">
-              <a:defRPr sz="1500" b="1">
+              <a:defRPr sz="1725" b="1">
                 <a:solidFill>
                   <a:srgbClr val="2F785D"/>
                 </a:solidFill>
@@ -8825,7 +8833,7 @@
               </a:defRPr>
             </a:pPr>
             <a:r>
-              <a:rPr sz="1500" b="1">
+              <a:rPr sz="1725" b="1">
                 <a:solidFill>
                   <a:srgbClr val="2F785D"/>
                 </a:solidFill>
@@ -8833,7 +8841,7 @@
                 <a:ea typeface="Arial"/>
                 <a:cs typeface="Arial"/>
               </a:rPr>
-              <a:t>Check the result: Simplify and check by multiplying back.</a:t>
+              <a:t>3/8</a:t>
             </a:r>
           </a:p>
         </p:txBody>
@@ -8841,7 +8849,7 @@
     </p:spTree>
     <p:extLst>
       <p:ext uri="{BB962C8B-B14F-4D97-AF65-F5344CB8AC3E}">
-        <p14:creationId xmlns:p14="http://schemas.microsoft.com/office/powerpoint/2010/main" val="1831904470"/>
+        <p14:creationId xmlns:p14="http://schemas.microsoft.com/office/powerpoint/2010/main" val="1233357356"/>
       </p:ext>
     </p:extLst>
   </p:cSld>
@@ -9134,7 +9142,7 @@
           <p:cNvPr id="15" name="">
             <a:extLst xmlns:a="http://schemas.openxmlformats.org/drawingml/2006/main">
               <a:ext uri="{FF2B5EF4-FFF2-40B4-BE49-F238E27FC236}">
-                <a16:creationId xmlns:a16="http://schemas.microsoft.com/office/drawing/2014/main" id="{26AACE98-855F-4031-AB54-B1535C0B52AB}"/>
+                <a16:creationId xmlns:a16="http://schemas.microsoft.com/office/drawing/2014/main" id="{94112146-D63C-4D48-8883-B201F8B18EFF}"/>
               </a:ext>
             </a:extLst>
           </p:cNvPr>
@@ -9166,7 +9174,7 @@
           <p:cNvPr id="2" name="">
             <a:extLst xmlns:a="http://schemas.openxmlformats.org/drawingml/2006/main">
               <a:ext uri="{FF2B5EF4-FFF2-40B4-BE49-F238E27FC236}">
-                <a16:creationId xmlns:a16="http://schemas.microsoft.com/office/drawing/2014/main" id="{844AF970-BFAD-4CB2-B301-37197CA37E7F}"/>
+                <a16:creationId xmlns:a16="http://schemas.microsoft.com/office/drawing/2014/main" id="{EAF574BF-703C-4914-827D-3C66A8C24FA1}"/>
               </a:ext>
             </a:extLst>
           </p:cNvPr>
@@ -9223,7 +9231,7 @@
           <p:cNvPr id="3" name="">
             <a:extLst xmlns:a="http://schemas.openxmlformats.org/drawingml/2006/main">
               <a:ext uri="{FF2B5EF4-FFF2-40B4-BE49-F238E27FC236}">
-                <a16:creationId xmlns:a16="http://schemas.microsoft.com/office/drawing/2014/main" id="{758E6802-9FF5-4DA2-BF0B-B02FC3F4F586}"/>
+                <a16:creationId xmlns:a16="http://schemas.microsoft.com/office/drawing/2014/main" id="{501FED6B-5136-4C61-B2D1-C2CA1097E3C8}"/>
               </a:ext>
             </a:extLst>
           </p:cNvPr>
@@ -9255,7 +9263,7 @@
           <p:cNvPr id="4" name="">
             <a:extLst xmlns:a="http://schemas.openxmlformats.org/drawingml/2006/main">
               <a:ext uri="{FF2B5EF4-FFF2-40B4-BE49-F238E27FC236}">
-                <a16:creationId xmlns:a16="http://schemas.microsoft.com/office/drawing/2014/main" id="{C9FE4757-CB2C-46CD-BA5B-2CAFD7196437}"/>
+                <a16:creationId xmlns:a16="http://schemas.microsoft.com/office/drawing/2014/main" id="{E59AAF5D-8A5D-4871-8757-9C8C196F63AA}"/>
               </a:ext>
             </a:extLst>
           </p:cNvPr>
@@ -9312,7 +9320,7 @@
           <p:cNvPr id="5" name="">
             <a:extLst xmlns:a="http://schemas.openxmlformats.org/drawingml/2006/main">
               <a:ext uri="{FF2B5EF4-FFF2-40B4-BE49-F238E27FC236}">
-                <a16:creationId xmlns:a16="http://schemas.microsoft.com/office/drawing/2014/main" id="{A33E1E1C-4D6D-473B-AF0F-82ADFDC2EA7A}"/>
+                <a16:creationId xmlns:a16="http://schemas.microsoft.com/office/drawing/2014/main" id="{10A51140-5AC8-43E8-BBEB-F9C2B685C5B7}"/>
               </a:ext>
             </a:extLst>
           </p:cNvPr>
@@ -9369,7 +9377,7 @@
           <p:cNvPr id="6" name="">
             <a:extLst xmlns:a="http://schemas.openxmlformats.org/drawingml/2006/main">
               <a:ext uri="{FF2B5EF4-FFF2-40B4-BE49-F238E27FC236}">
-                <a16:creationId xmlns:a16="http://schemas.microsoft.com/office/drawing/2014/main" id="{F1171073-1B9A-4BCC-8BD6-14CC34579A29}"/>
+                <a16:creationId xmlns:a16="http://schemas.microsoft.com/office/drawing/2014/main" id="{8838F824-F5DF-4CD2-90CB-745B0133C5B4}"/>
               </a:ext>
             </a:extLst>
           </p:cNvPr>
@@ -9426,7 +9434,7 @@
           <p:cNvPr id="7" name="">
             <a:extLst xmlns:a="http://schemas.openxmlformats.org/drawingml/2006/main">
               <a:ext uri="{FF2B5EF4-FFF2-40B4-BE49-F238E27FC236}">
-                <a16:creationId xmlns:a16="http://schemas.microsoft.com/office/drawing/2014/main" id="{0A96DC83-FD9B-4B7E-886C-21AE7E98388D}"/>
+                <a16:creationId xmlns:a16="http://schemas.microsoft.com/office/drawing/2014/main" id="{C3603750-F66E-4B7E-B932-239AF27F2D30}"/>
               </a:ext>
             </a:extLst>
           </p:cNvPr>
@@ -9458,7 +9466,7 @@
           <p:cNvPr id="8" name="">
             <a:extLst xmlns:a="http://schemas.openxmlformats.org/drawingml/2006/main">
               <a:ext uri="{FF2B5EF4-FFF2-40B4-BE49-F238E27FC236}">
-                <a16:creationId xmlns:a16="http://schemas.microsoft.com/office/drawing/2014/main" id="{7B1920EA-071A-45AF-AA7D-407EA338B282}"/>
+                <a16:creationId xmlns:a16="http://schemas.microsoft.com/office/drawing/2014/main" id="{BA16B75F-9D5C-4872-B602-FED99DA8C789}"/>
               </a:ext>
             </a:extLst>
           </p:cNvPr>
@@ -9515,7 +9523,7 @@
           <p:cNvPr id="9" name="">
             <a:extLst xmlns:a="http://schemas.openxmlformats.org/drawingml/2006/main">
               <a:ext uri="{FF2B5EF4-FFF2-40B4-BE49-F238E27FC236}">
-                <a16:creationId xmlns:a16="http://schemas.microsoft.com/office/drawing/2014/main" id="{F89612DE-1ED2-4FE3-BA43-A55ED40BC0DD}"/>
+                <a16:creationId xmlns:a16="http://schemas.microsoft.com/office/drawing/2014/main" id="{B53D08FE-5B32-4D85-9A88-071F852E4FA3}"/>
               </a:ext>
             </a:extLst>
           </p:cNvPr>
@@ -9572,7 +9580,7 @@
           <p:cNvPr id="10" name="">
             <a:extLst xmlns:a="http://schemas.openxmlformats.org/drawingml/2006/main">
               <a:ext uri="{FF2B5EF4-FFF2-40B4-BE49-F238E27FC236}">
-                <a16:creationId xmlns:a16="http://schemas.microsoft.com/office/drawing/2014/main" id="{176C51E7-9B19-4DCB-A805-9DE4394A7252}"/>
+                <a16:creationId xmlns:a16="http://schemas.microsoft.com/office/drawing/2014/main" id="{62B8FBA1-F559-4CAC-85F7-9030C26175A1}"/>
               </a:ext>
             </a:extLst>
           </p:cNvPr>
@@ -9629,7 +9637,7 @@
           <p:cNvPr id="11" name="">
             <a:extLst xmlns:a="http://schemas.openxmlformats.org/drawingml/2006/main">
               <a:ext uri="{FF2B5EF4-FFF2-40B4-BE49-F238E27FC236}">
-                <a16:creationId xmlns:a16="http://schemas.microsoft.com/office/drawing/2014/main" id="{F0A1A486-D070-4E34-BFDD-F65ACE5C0DAD}"/>
+                <a16:creationId xmlns:a16="http://schemas.microsoft.com/office/drawing/2014/main" id="{CAA415D9-DE27-4CF7-9DD1-FCC682815B7E}"/>
               </a:ext>
             </a:extLst>
           </p:cNvPr>
@@ -9686,7 +9694,7 @@
           <p:cNvPr id="12" name="">
             <a:extLst xmlns:a="http://schemas.openxmlformats.org/drawingml/2006/main">
               <a:ext uri="{FF2B5EF4-FFF2-40B4-BE49-F238E27FC236}">
-                <a16:creationId xmlns:a16="http://schemas.microsoft.com/office/drawing/2014/main" id="{6C90362E-1907-4D45-BD41-BDC889AF409A}"/>
+                <a16:creationId xmlns:a16="http://schemas.microsoft.com/office/drawing/2014/main" id="{33EAAB48-3BC4-48BC-BC11-3AAA05DD5E7D}"/>
               </a:ext>
             </a:extLst>
           </p:cNvPr>
@@ -9718,7 +9726,7 @@
           <p:cNvPr id="13" name="">
             <a:extLst xmlns:a="http://schemas.openxmlformats.org/drawingml/2006/main">
               <a:ext uri="{FF2B5EF4-FFF2-40B4-BE49-F238E27FC236}">
-                <a16:creationId xmlns:a16="http://schemas.microsoft.com/office/drawing/2014/main" id="{87F855A5-7992-4E61-8740-0D750C45425F}"/>
+                <a16:creationId xmlns:a16="http://schemas.microsoft.com/office/drawing/2014/main" id="{5D833829-89C7-45F2-95BC-329143CB6084}"/>
               </a:ext>
             </a:extLst>
           </p:cNvPr>
@@ -9775,7 +9783,7 @@
           <p:cNvPr id="14" name="">
             <a:extLst xmlns:a="http://schemas.openxmlformats.org/drawingml/2006/main">
               <a:ext uri="{FF2B5EF4-FFF2-40B4-BE49-F238E27FC236}">
-                <a16:creationId xmlns:a16="http://schemas.microsoft.com/office/drawing/2014/main" id="{575F120E-F999-4EC3-9D70-2202285FCEB7}"/>
+                <a16:creationId xmlns:a16="http://schemas.microsoft.com/office/drawing/2014/main" id="{791073AB-98B4-4284-8500-79D76094DC95}"/>
               </a:ext>
             </a:extLst>
           </p:cNvPr>
@@ -9830,7 +9838,7 @@
     </p:spTree>
     <p:extLst>
       <p:ext uri="{BB962C8B-B14F-4D97-AF65-F5344CB8AC3E}">
-        <p14:creationId xmlns:p14="http://schemas.microsoft.com/office/powerpoint/2010/main" val="879623347"/>
+        <p14:creationId xmlns:p14="http://schemas.microsoft.com/office/powerpoint/2010/main" val="1301281376"/>
       </p:ext>
     </p:extLst>
   </p:cSld>
@@ -10031,7 +10039,7 @@
           <p:cNvPr id="16" name="">
             <a:extLst xmlns:a="http://schemas.openxmlformats.org/drawingml/2006/main">
               <a:ext uri="{FF2B5EF4-FFF2-40B4-BE49-F238E27FC236}">
-                <a16:creationId xmlns:a16="http://schemas.microsoft.com/office/drawing/2014/main" id="{DFE951AC-80DD-490B-A73F-786997B98480}"/>
+                <a16:creationId xmlns:a16="http://schemas.microsoft.com/office/drawing/2014/main" id="{9BDCEFEE-0671-4628-87E2-708685C3497E}"/>
               </a:ext>
             </a:extLst>
           </p:cNvPr>
@@ -10063,7 +10071,7 @@
           <p:cNvPr id="2" name="">
             <a:extLst xmlns:a="http://schemas.openxmlformats.org/drawingml/2006/main">
               <a:ext uri="{FF2B5EF4-FFF2-40B4-BE49-F238E27FC236}">
-                <a16:creationId xmlns:a16="http://schemas.microsoft.com/office/drawing/2014/main" id="{A2B69883-F950-466B-BBB0-3E84F9BE42E1}"/>
+                <a16:creationId xmlns:a16="http://schemas.microsoft.com/office/drawing/2014/main" id="{D560BE55-A293-4778-9C08-223E0D646F37}"/>
               </a:ext>
             </a:extLst>
           </p:cNvPr>
@@ -10120,7 +10128,7 @@
           <p:cNvPr id="3" name="">
             <a:extLst xmlns:a="http://schemas.openxmlformats.org/drawingml/2006/main">
               <a:ext uri="{FF2B5EF4-FFF2-40B4-BE49-F238E27FC236}">
-                <a16:creationId xmlns:a16="http://schemas.microsoft.com/office/drawing/2014/main" id="{13A92B6B-7B1A-4749-A293-628A083E485B}"/>
+                <a16:creationId xmlns:a16="http://schemas.microsoft.com/office/drawing/2014/main" id="{CC47F52B-D9DE-4A16-91F8-A341566A6A44}"/>
               </a:ext>
             </a:extLst>
           </p:cNvPr>
@@ -10152,7 +10160,7 @@
           <p:cNvPr id="4" name="">
             <a:extLst xmlns:a="http://schemas.openxmlformats.org/drawingml/2006/main">
               <a:ext uri="{FF2B5EF4-FFF2-40B4-BE49-F238E27FC236}">
-                <a16:creationId xmlns:a16="http://schemas.microsoft.com/office/drawing/2014/main" id="{D9D452A8-4719-492C-A24F-157AEEE5BBF3}"/>
+                <a16:creationId xmlns:a16="http://schemas.microsoft.com/office/drawing/2014/main" id="{0CF42EF0-082A-4002-A190-EB0EE676A685}"/>
               </a:ext>
             </a:extLst>
           </p:cNvPr>
@@ -10209,7 +10217,7 @@
           <p:cNvPr id="5" name="">
             <a:extLst xmlns:a="http://schemas.openxmlformats.org/drawingml/2006/main">
               <a:ext uri="{FF2B5EF4-FFF2-40B4-BE49-F238E27FC236}">
-                <a16:creationId xmlns:a16="http://schemas.microsoft.com/office/drawing/2014/main" id="{3EEDBA54-8B34-49CA-956C-DF655FAC1E89}"/>
+                <a16:creationId xmlns:a16="http://schemas.microsoft.com/office/drawing/2014/main" id="{AD94D1E0-3783-4951-9038-F72094C6E97E}"/>
               </a:ext>
             </a:extLst>
           </p:cNvPr>
@@ -10266,7 +10274,7 @@
           <p:cNvPr id="6" name="">
             <a:extLst xmlns:a="http://schemas.openxmlformats.org/drawingml/2006/main">
               <a:ext uri="{FF2B5EF4-FFF2-40B4-BE49-F238E27FC236}">
-                <a16:creationId xmlns:a16="http://schemas.microsoft.com/office/drawing/2014/main" id="{EDB01BE8-3D62-45F7-8559-626C8C61C95F}"/>
+                <a16:creationId xmlns:a16="http://schemas.microsoft.com/office/drawing/2014/main" id="{25AEF0DB-8F77-405D-8952-7FDA1177BB7A}"/>
               </a:ext>
             </a:extLst>
           </p:cNvPr>
@@ -10323,7 +10331,7 @@
           <p:cNvPr id="7" name="">
             <a:extLst xmlns:a="http://schemas.openxmlformats.org/drawingml/2006/main">
               <a:ext uri="{FF2B5EF4-FFF2-40B4-BE49-F238E27FC236}">
-                <a16:creationId xmlns:a16="http://schemas.microsoft.com/office/drawing/2014/main" id="{D2D9BC79-40CD-4CA5-AD20-5808D059C2F3}"/>
+                <a16:creationId xmlns:a16="http://schemas.microsoft.com/office/drawing/2014/main" id="{9A58DED9-900A-4FEE-9670-CD7208955CDB}"/>
               </a:ext>
             </a:extLst>
           </p:cNvPr>
@@ -10355,7 +10363,7 @@
           <p:cNvPr id="8" name="">
             <a:extLst xmlns:a="http://schemas.openxmlformats.org/drawingml/2006/main">
               <a:ext uri="{FF2B5EF4-FFF2-40B4-BE49-F238E27FC236}">
-                <a16:creationId xmlns:a16="http://schemas.microsoft.com/office/drawing/2014/main" id="{582F41E2-5523-460C-8074-A4305219D691}"/>
+                <a16:creationId xmlns:a16="http://schemas.microsoft.com/office/drawing/2014/main" id="{6805A160-CE9F-42FF-B7D6-E4EFE9D5D6A1}"/>
               </a:ext>
             </a:extLst>
           </p:cNvPr>
@@ -10412,7 +10420,7 @@
           <p:cNvPr id="9" name="">
             <a:extLst xmlns:a="http://schemas.openxmlformats.org/drawingml/2006/main">
               <a:ext uri="{FF2B5EF4-FFF2-40B4-BE49-F238E27FC236}">
-                <a16:creationId xmlns:a16="http://schemas.microsoft.com/office/drawing/2014/main" id="{9AC34617-BA93-44CE-8A3A-FCB331CF98E6}"/>
+                <a16:creationId xmlns:a16="http://schemas.microsoft.com/office/drawing/2014/main" id="{69027C35-7AB4-40A4-962B-0AE74E567C98}"/>
               </a:ext>
             </a:extLst>
           </p:cNvPr>
@@ -10469,7 +10477,7 @@
           <p:cNvPr id="10" name="">
             <a:extLst xmlns:a="http://schemas.openxmlformats.org/drawingml/2006/main">
               <a:ext uri="{FF2B5EF4-FFF2-40B4-BE49-F238E27FC236}">
-                <a16:creationId xmlns:a16="http://schemas.microsoft.com/office/drawing/2014/main" id="{6C154A62-B6BD-4273-B5E0-A35B1F0E3B23}"/>
+                <a16:creationId xmlns:a16="http://schemas.microsoft.com/office/drawing/2014/main" id="{B38F0A34-E920-44E4-99E1-8125CB0183FF}"/>
               </a:ext>
             </a:extLst>
           </p:cNvPr>
@@ -10526,7 +10534,7 @@
           <p:cNvPr id="11" name="">
             <a:extLst xmlns:a="http://schemas.openxmlformats.org/drawingml/2006/main">
               <a:ext uri="{FF2B5EF4-FFF2-40B4-BE49-F238E27FC236}">
-                <a16:creationId xmlns:a16="http://schemas.microsoft.com/office/drawing/2014/main" id="{7EB76CFD-E415-4AC0-903E-629A637FE552}"/>
+                <a16:creationId xmlns:a16="http://schemas.microsoft.com/office/drawing/2014/main" id="{C292B532-DBC2-4F18-BED7-8D313EB31BEC}"/>
               </a:ext>
             </a:extLst>
           </p:cNvPr>
@@ -10583,7 +10591,7 @@
           <p:cNvPr id="12" name="">
             <a:extLst xmlns:a="http://schemas.openxmlformats.org/drawingml/2006/main">
               <a:ext uri="{FF2B5EF4-FFF2-40B4-BE49-F238E27FC236}">
-                <a16:creationId xmlns:a16="http://schemas.microsoft.com/office/drawing/2014/main" id="{24527C21-ECB5-48A3-8FBF-5D23E02C9523}"/>
+                <a16:creationId xmlns:a16="http://schemas.microsoft.com/office/drawing/2014/main" id="{4A316347-ABB3-4208-B133-4FFD44492B8D}"/>
               </a:ext>
             </a:extLst>
           </p:cNvPr>
@@ -10640,7 +10648,7 @@
           <p:cNvPr id="13" name="">
             <a:extLst xmlns:a="http://schemas.openxmlformats.org/drawingml/2006/main">
               <a:ext uri="{FF2B5EF4-FFF2-40B4-BE49-F238E27FC236}">
-                <a16:creationId xmlns:a16="http://schemas.microsoft.com/office/drawing/2014/main" id="{2477B20E-3987-4032-A265-47EEE8373D81}"/>
+                <a16:creationId xmlns:a16="http://schemas.microsoft.com/office/drawing/2014/main" id="{C04CD1AD-F9EE-43C8-8D74-AAE672B7A9FC}"/>
               </a:ext>
             </a:extLst>
           </p:cNvPr>
@@ -10697,7 +10705,7 @@
           <p:cNvPr id="14" name="">
             <a:extLst xmlns:a="http://schemas.openxmlformats.org/drawingml/2006/main">
               <a:ext uri="{FF2B5EF4-FFF2-40B4-BE49-F238E27FC236}">
-                <a16:creationId xmlns:a16="http://schemas.microsoft.com/office/drawing/2014/main" id="{0BA1ED1B-8B66-42D9-9C45-780EDFBEC313}"/>
+                <a16:creationId xmlns:a16="http://schemas.microsoft.com/office/drawing/2014/main" id="{73FD1C74-1980-4625-96C4-5F744D51DF08}"/>
               </a:ext>
             </a:extLst>
           </p:cNvPr>
@@ -10754,7 +10762,7 @@
           <p:cNvPr id="15" name="">
             <a:extLst xmlns:a="http://schemas.openxmlformats.org/drawingml/2006/main">
               <a:ext uri="{FF2B5EF4-FFF2-40B4-BE49-F238E27FC236}">
-                <a16:creationId xmlns:a16="http://schemas.microsoft.com/office/drawing/2014/main" id="{BF9E7853-BB1D-4260-A1C3-DF212A1823BA}"/>
+                <a16:creationId xmlns:a16="http://schemas.microsoft.com/office/drawing/2014/main" id="{22F2B045-A7FF-4F3A-8946-22FE871BF41A}"/>
               </a:ext>
             </a:extLst>
           </p:cNvPr>
@@ -10809,7 +10817,7 @@
     </p:spTree>
     <p:extLst>
       <p:ext uri="{BB962C8B-B14F-4D97-AF65-F5344CB8AC3E}">
-        <p14:creationId xmlns:p14="http://schemas.microsoft.com/office/powerpoint/2010/main" val="994963907"/>
+        <p14:creationId xmlns:p14="http://schemas.microsoft.com/office/powerpoint/2010/main" val="1904538346"/>
       </p:ext>
     </p:extLst>
   </p:cSld>
@@ -10964,7 +10972,7 @@
           <p:cNvPr id="16" name="">
             <a:extLst xmlns:a="http://schemas.openxmlformats.org/drawingml/2006/main">
               <a:ext uri="{FF2B5EF4-FFF2-40B4-BE49-F238E27FC236}">
-                <a16:creationId xmlns:a16="http://schemas.microsoft.com/office/drawing/2014/main" id="{F0B031C9-F4B9-48F8-802B-75D758B12386}"/>
+                <a16:creationId xmlns:a16="http://schemas.microsoft.com/office/drawing/2014/main" id="{D03020E2-9506-40EB-8D2A-8D44B573544A}"/>
               </a:ext>
             </a:extLst>
           </p:cNvPr>
@@ -10996,7 +11004,7 @@
           <p:cNvPr id="2" name="">
             <a:extLst xmlns:a="http://schemas.openxmlformats.org/drawingml/2006/main">
               <a:ext uri="{FF2B5EF4-FFF2-40B4-BE49-F238E27FC236}">
-                <a16:creationId xmlns:a16="http://schemas.microsoft.com/office/drawing/2014/main" id="{D965B553-E090-4AA4-B8AE-7B4D63D9997A}"/>
+                <a16:creationId xmlns:a16="http://schemas.microsoft.com/office/drawing/2014/main" id="{A3DD9387-8772-4E2F-8E67-FF9E09C06789}"/>
               </a:ext>
             </a:extLst>
           </p:cNvPr>
@@ -11053,7 +11061,7 @@
           <p:cNvPr id="3" name="">
             <a:extLst xmlns:a="http://schemas.openxmlformats.org/drawingml/2006/main">
               <a:ext uri="{FF2B5EF4-FFF2-40B4-BE49-F238E27FC236}">
-                <a16:creationId xmlns:a16="http://schemas.microsoft.com/office/drawing/2014/main" id="{AED4B375-714F-4D49-B4FB-AABE6B9C7017}"/>
+                <a16:creationId xmlns:a16="http://schemas.microsoft.com/office/drawing/2014/main" id="{7964DC76-B3D7-4528-A596-6C370F7F2941}"/>
               </a:ext>
             </a:extLst>
           </p:cNvPr>
@@ -11085,7 +11093,7 @@
           <p:cNvPr id="4" name="">
             <a:extLst xmlns:a="http://schemas.openxmlformats.org/drawingml/2006/main">
               <a:ext uri="{FF2B5EF4-FFF2-40B4-BE49-F238E27FC236}">
-                <a16:creationId xmlns:a16="http://schemas.microsoft.com/office/drawing/2014/main" id="{2D70D4A8-066F-4D40-828E-CFE1345FD351}"/>
+                <a16:creationId xmlns:a16="http://schemas.microsoft.com/office/drawing/2014/main" id="{263D47F4-7621-4B82-AF76-538131D1F979}"/>
               </a:ext>
             </a:extLst>
           </p:cNvPr>
@@ -11142,7 +11150,7 @@
           <p:cNvPr id="5" name="">
             <a:extLst xmlns:a="http://schemas.openxmlformats.org/drawingml/2006/main">
               <a:ext uri="{FF2B5EF4-FFF2-40B4-BE49-F238E27FC236}">
-                <a16:creationId xmlns:a16="http://schemas.microsoft.com/office/drawing/2014/main" id="{F24BD1D6-8920-4317-9F9D-3A542F4DACBA}"/>
+                <a16:creationId xmlns:a16="http://schemas.microsoft.com/office/drawing/2014/main" id="{02EB4742-C712-4AC1-90B8-FB1A42277864}"/>
               </a:ext>
             </a:extLst>
           </p:cNvPr>
@@ -11199,7 +11207,7 @@
           <p:cNvPr id="6" name="">
             <a:extLst xmlns:a="http://schemas.openxmlformats.org/drawingml/2006/main">
               <a:ext uri="{FF2B5EF4-FFF2-40B4-BE49-F238E27FC236}">
-                <a16:creationId xmlns:a16="http://schemas.microsoft.com/office/drawing/2014/main" id="{86BABCD2-F685-4C6F-84F6-EAE0A4DDD697}"/>
+                <a16:creationId xmlns:a16="http://schemas.microsoft.com/office/drawing/2014/main" id="{E7F36FE4-8DB1-45B8-A8C1-367A0FDF2E51}"/>
               </a:ext>
             </a:extLst>
           </p:cNvPr>
@@ -11256,7 +11264,7 @@
           <p:cNvPr id="7" name="">
             <a:extLst xmlns:a="http://schemas.openxmlformats.org/drawingml/2006/main">
               <a:ext uri="{FF2B5EF4-FFF2-40B4-BE49-F238E27FC236}">
-                <a16:creationId xmlns:a16="http://schemas.microsoft.com/office/drawing/2014/main" id="{1C122F17-4D4F-42C6-B8ED-FAAF383BE683}"/>
+                <a16:creationId xmlns:a16="http://schemas.microsoft.com/office/drawing/2014/main" id="{B1D0539B-E338-49FF-BAF6-0775F353412C}"/>
               </a:ext>
             </a:extLst>
           </p:cNvPr>
@@ -11288,7 +11296,7 @@
           <p:cNvPr id="8" name="">
             <a:extLst xmlns:a="http://schemas.openxmlformats.org/drawingml/2006/main">
               <a:ext uri="{FF2B5EF4-FFF2-40B4-BE49-F238E27FC236}">
-                <a16:creationId xmlns:a16="http://schemas.microsoft.com/office/drawing/2014/main" id="{A96D99A6-3376-486C-80B9-826CFAD2314B}"/>
+                <a16:creationId xmlns:a16="http://schemas.microsoft.com/office/drawing/2014/main" id="{35824150-4B3C-4781-9E3C-BC43C91F1BD4}"/>
               </a:ext>
             </a:extLst>
           </p:cNvPr>
@@ -11345,7 +11353,7 @@
           <p:cNvPr id="9" name="">
             <a:extLst xmlns:a="http://schemas.openxmlformats.org/drawingml/2006/main">
               <a:ext uri="{FF2B5EF4-FFF2-40B4-BE49-F238E27FC236}">
-                <a16:creationId xmlns:a16="http://schemas.microsoft.com/office/drawing/2014/main" id="{CAA19189-8867-4232-BAD5-1430C6E57F0D}"/>
+                <a16:creationId xmlns:a16="http://schemas.microsoft.com/office/drawing/2014/main" id="{1638C0B5-86EC-4C3F-9070-3CF96C46B087}"/>
               </a:ext>
             </a:extLst>
           </p:cNvPr>
@@ -11406,7 +11414,7 @@
           <p:nvPr/>
         </p:nvPicPr>
         <p:blipFill>
-          <a:blip xmlns:r="http://schemas.openxmlformats.org/officeDocument/2006/relationships" xmlns:a="http://schemas.openxmlformats.org/drawingml/2006/main" r:embed="Rad64f739d77d4066"/>
+          <a:blip xmlns:r="http://schemas.openxmlformats.org/officeDocument/2006/relationships" xmlns:a="http://schemas.openxmlformats.org/drawingml/2006/main" r:embed="R3451c2f7ebfb427c"/>
           <a:stretch xmlns:a="http://schemas.openxmlformats.org/drawingml/2006/main"/>
         </p:blipFill>
         <p:spPr>
@@ -11424,7 +11432,7 @@
           <p:cNvPr id="11" name="">
             <a:extLst xmlns:a="http://schemas.openxmlformats.org/drawingml/2006/main">
               <a:ext uri="{FF2B5EF4-FFF2-40B4-BE49-F238E27FC236}">
-                <a16:creationId xmlns:a16="http://schemas.microsoft.com/office/drawing/2014/main" id="{3E806DE2-BA07-4A5D-BFAF-AFBDF0837A14}"/>
+                <a16:creationId xmlns:a16="http://schemas.microsoft.com/office/drawing/2014/main" id="{2AC55D1A-0106-4485-B63B-76FCAE860E31}"/>
               </a:ext>
             </a:extLst>
           </p:cNvPr>
@@ -11481,7 +11489,7 @@
           <p:cNvPr id="12" name="">
             <a:extLst xmlns:a="http://schemas.openxmlformats.org/drawingml/2006/main">
               <a:ext uri="{FF2B5EF4-FFF2-40B4-BE49-F238E27FC236}">
-                <a16:creationId xmlns:a16="http://schemas.microsoft.com/office/drawing/2014/main" id="{98D4E633-E808-4FD3-A670-296B551F8B45}"/>
+                <a16:creationId xmlns:a16="http://schemas.microsoft.com/office/drawing/2014/main" id="{43C05924-7756-4D6F-89BD-C39D853EE0EA}"/>
               </a:ext>
             </a:extLst>
           </p:cNvPr>
@@ -11538,7 +11546,7 @@
           <p:cNvPr id="13" name="">
             <a:extLst xmlns:a="http://schemas.openxmlformats.org/drawingml/2006/main">
               <a:ext uri="{FF2B5EF4-FFF2-40B4-BE49-F238E27FC236}">
-                <a16:creationId xmlns:a16="http://schemas.microsoft.com/office/drawing/2014/main" id="{C359BA7A-B8A2-4568-A902-84D97758B6EE}"/>
+                <a16:creationId xmlns:a16="http://schemas.microsoft.com/office/drawing/2014/main" id="{04E4E478-EC22-4282-AD5F-3DC91EA23DEB}"/>
               </a:ext>
             </a:extLst>
           </p:cNvPr>
@@ -11570,7 +11578,7 @@
           <p:cNvPr id="14" name="">
             <a:extLst xmlns:a="http://schemas.openxmlformats.org/drawingml/2006/main">
               <a:ext uri="{FF2B5EF4-FFF2-40B4-BE49-F238E27FC236}">
-                <a16:creationId xmlns:a16="http://schemas.microsoft.com/office/drawing/2014/main" id="{2C8EFD57-D419-4188-917B-23136ECA8726}"/>
+                <a16:creationId xmlns:a16="http://schemas.microsoft.com/office/drawing/2014/main" id="{C6E95DAC-9291-4985-8FB5-158B0BB3DD50}"/>
               </a:ext>
             </a:extLst>
           </p:cNvPr>
@@ -11627,7 +11635,7 @@
           <p:cNvPr id="15" name="">
             <a:extLst xmlns:a="http://schemas.openxmlformats.org/drawingml/2006/main">
               <a:ext uri="{FF2B5EF4-FFF2-40B4-BE49-F238E27FC236}">
-                <a16:creationId xmlns:a16="http://schemas.microsoft.com/office/drawing/2014/main" id="{7FE22540-0F86-43F0-BCAC-419D3C392F4B}"/>
+                <a16:creationId xmlns:a16="http://schemas.microsoft.com/office/drawing/2014/main" id="{D8F0AC3E-9055-480D-9678-DEC3FD6B95B5}"/>
               </a:ext>
             </a:extLst>
           </p:cNvPr>
@@ -11682,7 +11690,7 @@
     </p:spTree>
     <p:extLst>
       <p:ext uri="{BB962C8B-B14F-4D97-AF65-F5344CB8AC3E}">
-        <p14:creationId xmlns:p14="http://schemas.microsoft.com/office/powerpoint/2010/main" val="1181327762"/>
+        <p14:creationId xmlns:p14="http://schemas.microsoft.com/office/powerpoint/2010/main" val="2094946176"/>
       </p:ext>
     </p:extLst>
   </p:cSld>
@@ -11837,7 +11845,7 @@
           <p:cNvPr id="23" name="">
             <a:extLst xmlns:a="http://schemas.openxmlformats.org/drawingml/2006/main">
               <a:ext uri="{FF2B5EF4-FFF2-40B4-BE49-F238E27FC236}">
-                <a16:creationId xmlns:a16="http://schemas.microsoft.com/office/drawing/2014/main" id="{E8F57CFE-52E8-41B8-A6B4-D6BDA1223B3E}"/>
+                <a16:creationId xmlns:a16="http://schemas.microsoft.com/office/drawing/2014/main" id="{1220F7C8-E5CC-4954-B83A-9D969BA3D84F}"/>
               </a:ext>
             </a:extLst>
           </p:cNvPr>
@@ -11869,7 +11877,7 @@
           <p:cNvPr id="2" name="">
             <a:extLst xmlns:a="http://schemas.openxmlformats.org/drawingml/2006/main">
               <a:ext uri="{FF2B5EF4-FFF2-40B4-BE49-F238E27FC236}">
-                <a16:creationId xmlns:a16="http://schemas.microsoft.com/office/drawing/2014/main" id="{367BA84A-0EAE-4013-BBCD-E9375BA70B79}"/>
+                <a16:creationId xmlns:a16="http://schemas.microsoft.com/office/drawing/2014/main" id="{5130FDF7-C18A-49EA-988B-436338F4F176}"/>
               </a:ext>
             </a:extLst>
           </p:cNvPr>
@@ -11926,7 +11934,7 @@
           <p:cNvPr id="3" name="">
             <a:extLst xmlns:a="http://schemas.openxmlformats.org/drawingml/2006/main">
               <a:ext uri="{FF2B5EF4-FFF2-40B4-BE49-F238E27FC236}">
-                <a16:creationId xmlns:a16="http://schemas.microsoft.com/office/drawing/2014/main" id="{2CF9EEE6-AA88-466D-924A-8E1C92BEA8E4}"/>
+                <a16:creationId xmlns:a16="http://schemas.microsoft.com/office/drawing/2014/main" id="{D029DA07-DCCC-4BBE-934F-D28D18C9C1E8}"/>
               </a:ext>
             </a:extLst>
           </p:cNvPr>
@@ -11958,7 +11966,7 @@
           <p:cNvPr id="4" name="">
             <a:extLst xmlns:a="http://schemas.openxmlformats.org/drawingml/2006/main">
               <a:ext uri="{FF2B5EF4-FFF2-40B4-BE49-F238E27FC236}">
-                <a16:creationId xmlns:a16="http://schemas.microsoft.com/office/drawing/2014/main" id="{585E3DC7-A732-4AC2-859D-0B1025BE3F8A}"/>
+                <a16:creationId xmlns:a16="http://schemas.microsoft.com/office/drawing/2014/main" id="{F743B90A-5CAE-40C1-BA8A-1F7A077D81A9}"/>
               </a:ext>
             </a:extLst>
           </p:cNvPr>
@@ -12015,7 +12023,7 @@
           <p:cNvPr id="5" name="">
             <a:extLst xmlns:a="http://schemas.openxmlformats.org/drawingml/2006/main">
               <a:ext uri="{FF2B5EF4-FFF2-40B4-BE49-F238E27FC236}">
-                <a16:creationId xmlns:a16="http://schemas.microsoft.com/office/drawing/2014/main" id="{48A23E39-5DE6-4FE2-BF8C-BC81CF76EEC2}"/>
+                <a16:creationId xmlns:a16="http://schemas.microsoft.com/office/drawing/2014/main" id="{53A090AC-D0DC-461E-889E-C626068808BA}"/>
               </a:ext>
             </a:extLst>
           </p:cNvPr>
@@ -12072,7 +12080,7 @@
           <p:cNvPr id="6" name="">
             <a:extLst xmlns:a="http://schemas.openxmlformats.org/drawingml/2006/main">
               <a:ext uri="{FF2B5EF4-FFF2-40B4-BE49-F238E27FC236}">
-                <a16:creationId xmlns:a16="http://schemas.microsoft.com/office/drawing/2014/main" id="{D5E9D3C4-884B-495D-AADD-145D9F2147EF}"/>
+                <a16:creationId xmlns:a16="http://schemas.microsoft.com/office/drawing/2014/main" id="{16E69BAC-06A4-49B5-BF43-C256DA5BA5D5}"/>
               </a:ext>
             </a:extLst>
           </p:cNvPr>
@@ -12129,7 +12137,7 @@
           <p:cNvPr id="7" name="">
             <a:extLst xmlns:a="http://schemas.openxmlformats.org/drawingml/2006/main">
               <a:ext uri="{FF2B5EF4-FFF2-40B4-BE49-F238E27FC236}">
-                <a16:creationId xmlns:a16="http://schemas.microsoft.com/office/drawing/2014/main" id="{43CF6100-C2DB-4913-A052-391EDF10DFB3}"/>
+                <a16:creationId xmlns:a16="http://schemas.microsoft.com/office/drawing/2014/main" id="{AFFF6CC0-8FF1-4632-A4D9-E8684B45BABC}"/>
               </a:ext>
             </a:extLst>
           </p:cNvPr>
@@ -12161,7 +12169,7 @@
           <p:cNvPr id="8" name="">
             <a:extLst xmlns:a="http://schemas.openxmlformats.org/drawingml/2006/main">
               <a:ext uri="{FF2B5EF4-FFF2-40B4-BE49-F238E27FC236}">
-                <a16:creationId xmlns:a16="http://schemas.microsoft.com/office/drawing/2014/main" id="{9EAA9347-EC48-4829-91E1-ED3E7B815903}"/>
+                <a16:creationId xmlns:a16="http://schemas.microsoft.com/office/drawing/2014/main" id="{C0648FA8-8BBC-4244-9336-375114C7B11B}"/>
               </a:ext>
             </a:extLst>
           </p:cNvPr>
@@ -12218,7 +12226,7 @@
           <p:cNvPr id="9" name="">
             <a:extLst xmlns:a="http://schemas.openxmlformats.org/drawingml/2006/main">
               <a:ext uri="{FF2B5EF4-FFF2-40B4-BE49-F238E27FC236}">
-                <a16:creationId xmlns:a16="http://schemas.microsoft.com/office/drawing/2014/main" id="{DF246B09-37A7-41EE-8885-185900451B2A}"/>
+                <a16:creationId xmlns:a16="http://schemas.microsoft.com/office/drawing/2014/main" id="{491B5F2E-C215-4C67-BEDB-B40063DDB76C}"/>
               </a:ext>
             </a:extLst>
           </p:cNvPr>
@@ -12275,7 +12283,7 @@
           <p:cNvPr id="10" name="">
             <a:extLst xmlns:a="http://schemas.openxmlformats.org/drawingml/2006/main">
               <a:ext uri="{FF2B5EF4-FFF2-40B4-BE49-F238E27FC236}">
-                <a16:creationId xmlns:a16="http://schemas.microsoft.com/office/drawing/2014/main" id="{56109735-ACD4-46C9-ABE3-5579B9A8F94E}"/>
+                <a16:creationId xmlns:a16="http://schemas.microsoft.com/office/drawing/2014/main" id="{7E05A4FE-1B5A-4ABB-B1E4-8B68EFF0AFEB}"/>
               </a:ext>
             </a:extLst>
           </p:cNvPr>
@@ -12309,7 +12317,7 @@
           <p:cNvPr id="11" name="">
             <a:extLst xmlns:a="http://schemas.openxmlformats.org/drawingml/2006/main">
               <a:ext uri="{FF2B5EF4-FFF2-40B4-BE49-F238E27FC236}">
-                <a16:creationId xmlns:a16="http://schemas.microsoft.com/office/drawing/2014/main" id="{241CAA90-BAAA-4D8D-8667-D78B8B0932C8}"/>
+                <a16:creationId xmlns:a16="http://schemas.microsoft.com/office/drawing/2014/main" id="{25DAEAA8-4A4F-450D-BC1A-12A03E6082DB}"/>
               </a:ext>
             </a:extLst>
           </p:cNvPr>
@@ -12341,7 +12349,7 @@
           <p:cNvPr id="12" name="">
             <a:extLst xmlns:a="http://schemas.openxmlformats.org/drawingml/2006/main">
               <a:ext uri="{FF2B5EF4-FFF2-40B4-BE49-F238E27FC236}">
-                <a16:creationId xmlns:a16="http://schemas.microsoft.com/office/drawing/2014/main" id="{F1DD3D88-2CC9-4AC8-B60B-FC41C35B7405}"/>
+                <a16:creationId xmlns:a16="http://schemas.microsoft.com/office/drawing/2014/main" id="{C23895C6-1411-4863-BEA3-3D31A8CD4799}"/>
               </a:ext>
             </a:extLst>
           </p:cNvPr>
@@ -12398,7 +12406,7 @@
           <p:cNvPr id="13" name="">
             <a:extLst xmlns:a="http://schemas.openxmlformats.org/drawingml/2006/main">
               <a:ext uri="{FF2B5EF4-FFF2-40B4-BE49-F238E27FC236}">
-                <a16:creationId xmlns:a16="http://schemas.microsoft.com/office/drawing/2014/main" id="{39CFA7CF-D2CA-4870-B792-AA17B23DAE4F}"/>
+                <a16:creationId xmlns:a16="http://schemas.microsoft.com/office/drawing/2014/main" id="{D56416C9-8EAC-4C61-87D4-5E7938E99A4F}"/>
               </a:ext>
             </a:extLst>
           </p:cNvPr>
@@ -12455,7 +12463,7 @@
           <p:cNvPr id="14" name="">
             <a:extLst xmlns:a="http://schemas.openxmlformats.org/drawingml/2006/main">
               <a:ext uri="{FF2B5EF4-FFF2-40B4-BE49-F238E27FC236}">
-                <a16:creationId xmlns:a16="http://schemas.microsoft.com/office/drawing/2014/main" id="{86F0004B-14B4-4961-AB45-2D92DD40F1C0}"/>
+                <a16:creationId xmlns:a16="http://schemas.microsoft.com/office/drawing/2014/main" id="{BE465169-45C6-4A61-84EA-0EC0A389944C}"/>
               </a:ext>
             </a:extLst>
           </p:cNvPr>
@@ -12489,7 +12497,7 @@
           <p:cNvPr id="15" name="">
             <a:extLst xmlns:a="http://schemas.openxmlformats.org/drawingml/2006/main">
               <a:ext uri="{FF2B5EF4-FFF2-40B4-BE49-F238E27FC236}">
-                <a16:creationId xmlns:a16="http://schemas.microsoft.com/office/drawing/2014/main" id="{FD88F528-A6CF-486A-897D-2AF76ED30B4D}"/>
+                <a16:creationId xmlns:a16="http://schemas.microsoft.com/office/drawing/2014/main" id="{B170E669-D3CF-4C8F-9728-A37D27B3407D}"/>
               </a:ext>
             </a:extLst>
           </p:cNvPr>
@@ -12521,7 +12529,7 @@
           <p:cNvPr id="16" name="">
             <a:extLst xmlns:a="http://schemas.openxmlformats.org/drawingml/2006/main">
               <a:ext uri="{FF2B5EF4-FFF2-40B4-BE49-F238E27FC236}">
-                <a16:creationId xmlns:a16="http://schemas.microsoft.com/office/drawing/2014/main" id="{72919741-9DDA-425E-A32F-DFE27E835BE7}"/>
+                <a16:creationId xmlns:a16="http://schemas.microsoft.com/office/drawing/2014/main" id="{DB96225C-EE45-4A23-8BC9-66789FE3DA4C}"/>
               </a:ext>
             </a:extLst>
           </p:cNvPr>
@@ -12578,7 +12586,7 @@
           <p:cNvPr id="17" name="">
             <a:extLst xmlns:a="http://schemas.openxmlformats.org/drawingml/2006/main">
               <a:ext uri="{FF2B5EF4-FFF2-40B4-BE49-F238E27FC236}">
-                <a16:creationId xmlns:a16="http://schemas.microsoft.com/office/drawing/2014/main" id="{3B8A9AAE-0BFF-4122-AD14-A2A404806FE1}"/>
+                <a16:creationId xmlns:a16="http://schemas.microsoft.com/office/drawing/2014/main" id="{78EFB452-7A72-4AD7-BA0C-DF0D849C179B}"/>
               </a:ext>
             </a:extLst>
           </p:cNvPr>
@@ -12635,7 +12643,7 @@
           <p:cNvPr id="18" name="">
             <a:extLst xmlns:a="http://schemas.openxmlformats.org/drawingml/2006/main">
               <a:ext uri="{FF2B5EF4-FFF2-40B4-BE49-F238E27FC236}">
-                <a16:creationId xmlns:a16="http://schemas.microsoft.com/office/drawing/2014/main" id="{0D4860D2-6EF7-4134-B83D-7499F6EC22A1}"/>
+                <a16:creationId xmlns:a16="http://schemas.microsoft.com/office/drawing/2014/main" id="{5E95E54B-F4F1-4552-9954-233F1BED0F7C}"/>
               </a:ext>
             </a:extLst>
           </p:cNvPr>
@@ -12669,7 +12677,7 @@
           <p:cNvPr id="19" name="">
             <a:extLst xmlns:a="http://schemas.openxmlformats.org/drawingml/2006/main">
               <a:ext uri="{FF2B5EF4-FFF2-40B4-BE49-F238E27FC236}">
-                <a16:creationId xmlns:a16="http://schemas.microsoft.com/office/drawing/2014/main" id="{41011E15-B159-47BC-B40E-86B9EA9EF77D}"/>
+                <a16:creationId xmlns:a16="http://schemas.microsoft.com/office/drawing/2014/main" id="{ED8733D0-2C3D-4D8C-9B05-A86352155DDC}"/>
               </a:ext>
             </a:extLst>
           </p:cNvPr>
@@ -12701,7 +12709,7 @@
           <p:cNvPr id="20" name="">
             <a:extLst xmlns:a="http://schemas.openxmlformats.org/drawingml/2006/main">
               <a:ext uri="{FF2B5EF4-FFF2-40B4-BE49-F238E27FC236}">
-                <a16:creationId xmlns:a16="http://schemas.microsoft.com/office/drawing/2014/main" id="{CB29A3D1-61A5-4295-90D5-665709683ABB}"/>
+                <a16:creationId xmlns:a16="http://schemas.microsoft.com/office/drawing/2014/main" id="{4ABD24D3-FACC-4B7D-9FF5-542DD6CDADD7}"/>
               </a:ext>
             </a:extLst>
           </p:cNvPr>
@@ -12758,7 +12766,7 @@
           <p:cNvPr id="21" name="">
             <a:extLst xmlns:a="http://schemas.openxmlformats.org/drawingml/2006/main">
               <a:ext uri="{FF2B5EF4-FFF2-40B4-BE49-F238E27FC236}">
-                <a16:creationId xmlns:a16="http://schemas.microsoft.com/office/drawing/2014/main" id="{FB6808DD-0DDC-42E5-A02A-5F89FD57F006}"/>
+                <a16:creationId xmlns:a16="http://schemas.microsoft.com/office/drawing/2014/main" id="{4E976317-1A9C-44BF-B353-B560567C58BC}"/>
               </a:ext>
             </a:extLst>
           </p:cNvPr>
@@ -12815,7 +12823,7 @@
           <p:cNvPr id="22" name="">
             <a:extLst xmlns:a="http://schemas.openxmlformats.org/drawingml/2006/main">
               <a:ext uri="{FF2B5EF4-FFF2-40B4-BE49-F238E27FC236}">
-                <a16:creationId xmlns:a16="http://schemas.microsoft.com/office/drawing/2014/main" id="{BEE8D4BA-BC35-4625-8EB5-EBD7D6EF8562}"/>
+                <a16:creationId xmlns:a16="http://schemas.microsoft.com/office/drawing/2014/main" id="{3610266F-9D9D-40FE-A40D-4F3288E80390}"/>
               </a:ext>
             </a:extLst>
           </p:cNvPr>
@@ -12870,7 +12878,7 @@
     </p:spTree>
     <p:extLst>
       <p:ext uri="{BB962C8B-B14F-4D97-AF65-F5344CB8AC3E}">
-        <p14:creationId xmlns:p14="http://schemas.microsoft.com/office/powerpoint/2010/main" val="300040665"/>
+        <p14:creationId xmlns:p14="http://schemas.microsoft.com/office/powerpoint/2010/main" val="1388297919"/>
       </p:ext>
     </p:extLst>
   </p:cSld>
@@ -13071,7 +13079,7 @@
           <p:cNvPr id="22" name="">
             <a:extLst xmlns:a="http://schemas.openxmlformats.org/drawingml/2006/main">
               <a:ext uri="{FF2B5EF4-FFF2-40B4-BE49-F238E27FC236}">
-                <a16:creationId xmlns:a16="http://schemas.microsoft.com/office/drawing/2014/main" id="{628E2AEB-5217-49D6-8086-60CBA9728CBC}"/>
+                <a16:creationId xmlns:a16="http://schemas.microsoft.com/office/drawing/2014/main" id="{FA7AEA6D-4524-4267-ACCC-68F2267F920F}"/>
               </a:ext>
             </a:extLst>
           </p:cNvPr>
@@ -13103,7 +13111,7 @@
           <p:cNvPr id="2" name="">
             <a:extLst xmlns:a="http://schemas.openxmlformats.org/drawingml/2006/main">
               <a:ext uri="{FF2B5EF4-FFF2-40B4-BE49-F238E27FC236}">
-                <a16:creationId xmlns:a16="http://schemas.microsoft.com/office/drawing/2014/main" id="{EAB9CDA5-3FED-4823-94B5-197873C065CA}"/>
+                <a16:creationId xmlns:a16="http://schemas.microsoft.com/office/drawing/2014/main" id="{E4272CC5-955C-4E3D-B875-82AE0C8D61DD}"/>
               </a:ext>
             </a:extLst>
           </p:cNvPr>
@@ -13160,7 +13168,7 @@
           <p:cNvPr id="3" name="">
             <a:extLst xmlns:a="http://schemas.openxmlformats.org/drawingml/2006/main">
               <a:ext uri="{FF2B5EF4-FFF2-40B4-BE49-F238E27FC236}">
-                <a16:creationId xmlns:a16="http://schemas.microsoft.com/office/drawing/2014/main" id="{6F335159-0B99-432C-B678-9405EFF363A1}"/>
+                <a16:creationId xmlns:a16="http://schemas.microsoft.com/office/drawing/2014/main" id="{EB7E038C-C482-4BE0-90A7-D2EAC48D960A}"/>
               </a:ext>
             </a:extLst>
           </p:cNvPr>
@@ -13192,7 +13200,7 @@
           <p:cNvPr id="4" name="">
             <a:extLst xmlns:a="http://schemas.openxmlformats.org/drawingml/2006/main">
               <a:ext uri="{FF2B5EF4-FFF2-40B4-BE49-F238E27FC236}">
-                <a16:creationId xmlns:a16="http://schemas.microsoft.com/office/drawing/2014/main" id="{BA2B083C-C326-435A-AEE2-953B97AE5489}"/>
+                <a16:creationId xmlns:a16="http://schemas.microsoft.com/office/drawing/2014/main" id="{D3251FDD-248F-41E0-8B83-F2C0D9F9CF5A}"/>
               </a:ext>
             </a:extLst>
           </p:cNvPr>
@@ -13249,7 +13257,7 @@
           <p:cNvPr id="5" name="">
             <a:extLst xmlns:a="http://schemas.openxmlformats.org/drawingml/2006/main">
               <a:ext uri="{FF2B5EF4-FFF2-40B4-BE49-F238E27FC236}">
-                <a16:creationId xmlns:a16="http://schemas.microsoft.com/office/drawing/2014/main" id="{B3A82984-2D37-45C4-8573-CBBAAB30E84B}"/>
+                <a16:creationId xmlns:a16="http://schemas.microsoft.com/office/drawing/2014/main" id="{AFA81790-43A4-406E-A29F-C0DE9CE9B83B}"/>
               </a:ext>
             </a:extLst>
           </p:cNvPr>
@@ -13306,7 +13314,7 @@
           <p:cNvPr id="6" name="">
             <a:extLst xmlns:a="http://schemas.openxmlformats.org/drawingml/2006/main">
               <a:ext uri="{FF2B5EF4-FFF2-40B4-BE49-F238E27FC236}">
-                <a16:creationId xmlns:a16="http://schemas.microsoft.com/office/drawing/2014/main" id="{163062DD-6511-44E7-9A1D-3C7F9E32D038}"/>
+                <a16:creationId xmlns:a16="http://schemas.microsoft.com/office/drawing/2014/main" id="{751AC4B3-C3E5-41D0-9DE5-24DDB68432AD}"/>
               </a:ext>
             </a:extLst>
           </p:cNvPr>
@@ -13363,7 +13371,7 @@
           <p:cNvPr id="7" name="">
             <a:extLst xmlns:a="http://schemas.openxmlformats.org/drawingml/2006/main">
               <a:ext uri="{FF2B5EF4-FFF2-40B4-BE49-F238E27FC236}">
-                <a16:creationId xmlns:a16="http://schemas.microsoft.com/office/drawing/2014/main" id="{99067A43-097F-4B08-8583-B941A8AE4851}"/>
+                <a16:creationId xmlns:a16="http://schemas.microsoft.com/office/drawing/2014/main" id="{11EAE112-2C90-40DD-A689-95640AB1A91A}"/>
               </a:ext>
             </a:extLst>
           </p:cNvPr>
@@ -13395,7 +13403,7 @@
           <p:cNvPr id="8" name="">
             <a:extLst xmlns:a="http://schemas.openxmlformats.org/drawingml/2006/main">
               <a:ext uri="{FF2B5EF4-FFF2-40B4-BE49-F238E27FC236}">
-                <a16:creationId xmlns:a16="http://schemas.microsoft.com/office/drawing/2014/main" id="{D389C797-7976-4A47-9DE2-8D9F21262625}"/>
+                <a16:creationId xmlns:a16="http://schemas.microsoft.com/office/drawing/2014/main" id="{8B43E685-476E-42B9-9159-469D84984136}"/>
               </a:ext>
             </a:extLst>
           </p:cNvPr>
@@ -13452,7 +13460,7 @@
           <p:cNvPr id="9" name="">
             <a:extLst xmlns:a="http://schemas.openxmlformats.org/drawingml/2006/main">
               <a:ext uri="{FF2B5EF4-FFF2-40B4-BE49-F238E27FC236}">
-                <a16:creationId xmlns:a16="http://schemas.microsoft.com/office/drawing/2014/main" id="{B41ECF72-05D4-41E5-A23A-E57952253528}"/>
+                <a16:creationId xmlns:a16="http://schemas.microsoft.com/office/drawing/2014/main" id="{217C68B8-7B57-4CFE-B6D7-58DFF4AA9BDE}"/>
               </a:ext>
             </a:extLst>
           </p:cNvPr>
@@ -13509,7 +13517,7 @@
           <p:cNvPr id="10" name="">
             <a:extLst xmlns:a="http://schemas.openxmlformats.org/drawingml/2006/main">
               <a:ext uri="{FF2B5EF4-FFF2-40B4-BE49-F238E27FC236}">
-                <a16:creationId xmlns:a16="http://schemas.microsoft.com/office/drawing/2014/main" id="{57D7A03A-DD08-46B3-94BC-86E75F427C9F}"/>
+                <a16:creationId xmlns:a16="http://schemas.microsoft.com/office/drawing/2014/main" id="{F3D9EA29-D40E-41E4-8D35-BAEE5B693619}"/>
               </a:ext>
             </a:extLst>
           </p:cNvPr>
@@ -13543,7 +13551,7 @@
           <p:cNvPr id="11" name="">
             <a:extLst xmlns:a="http://schemas.openxmlformats.org/drawingml/2006/main">
               <a:ext uri="{FF2B5EF4-FFF2-40B4-BE49-F238E27FC236}">
-                <a16:creationId xmlns:a16="http://schemas.microsoft.com/office/drawing/2014/main" id="{EC0D5974-FA1B-4B66-B4F7-E3C01F8BC204}"/>
+                <a16:creationId xmlns:a16="http://schemas.microsoft.com/office/drawing/2014/main" id="{161CC691-6C48-44AD-AB60-9281228C6495}"/>
               </a:ext>
             </a:extLst>
           </p:cNvPr>
@@ -13575,7 +13583,7 @@
           <p:cNvPr id="12" name="">
             <a:extLst xmlns:a="http://schemas.openxmlformats.org/drawingml/2006/main">
               <a:ext uri="{FF2B5EF4-FFF2-40B4-BE49-F238E27FC236}">
-                <a16:creationId xmlns:a16="http://schemas.microsoft.com/office/drawing/2014/main" id="{E58088F4-CF02-4E73-955F-A710D7A0D84D}"/>
+                <a16:creationId xmlns:a16="http://schemas.microsoft.com/office/drawing/2014/main" id="{E4250905-C0F0-4FB8-BD04-B7EF1AF97C59}"/>
               </a:ext>
             </a:extLst>
           </p:cNvPr>
@@ -13632,7 +13640,7 @@
           <p:cNvPr id="13" name="">
             <a:extLst xmlns:a="http://schemas.openxmlformats.org/drawingml/2006/main">
               <a:ext uri="{FF2B5EF4-FFF2-40B4-BE49-F238E27FC236}">
-                <a16:creationId xmlns:a16="http://schemas.microsoft.com/office/drawing/2014/main" id="{7026B17D-5DB2-476D-8C33-2A80C3B2315D}"/>
+                <a16:creationId xmlns:a16="http://schemas.microsoft.com/office/drawing/2014/main" id="{084338A1-4AE5-4C14-8518-34E15FDCE72B}"/>
               </a:ext>
             </a:extLst>
           </p:cNvPr>
@@ -13689,7 +13697,7 @@
           <p:cNvPr id="14" name="">
             <a:extLst xmlns:a="http://schemas.openxmlformats.org/drawingml/2006/main">
               <a:ext uri="{FF2B5EF4-FFF2-40B4-BE49-F238E27FC236}">
-                <a16:creationId xmlns:a16="http://schemas.microsoft.com/office/drawing/2014/main" id="{5C25CA62-8DF3-42D2-9886-44D09558C1C9}"/>
+                <a16:creationId xmlns:a16="http://schemas.microsoft.com/office/drawing/2014/main" id="{AC82E1F1-B044-4804-A34C-8222946DEEBE}"/>
               </a:ext>
             </a:extLst>
           </p:cNvPr>
@@ -13723,7 +13731,7 @@
           <p:cNvPr id="15" name="">
             <a:extLst xmlns:a="http://schemas.openxmlformats.org/drawingml/2006/main">
               <a:ext uri="{FF2B5EF4-FFF2-40B4-BE49-F238E27FC236}">
-                <a16:creationId xmlns:a16="http://schemas.microsoft.com/office/drawing/2014/main" id="{597763F1-CE4C-49C4-A5EF-F85D1E854096}"/>
+                <a16:creationId xmlns:a16="http://schemas.microsoft.com/office/drawing/2014/main" id="{80804F24-C625-462E-B76D-325BA0A53CDA}"/>
               </a:ext>
             </a:extLst>
           </p:cNvPr>
@@ -13755,7 +13763,7 @@
           <p:cNvPr id="16" name="">
             <a:extLst xmlns:a="http://schemas.openxmlformats.org/drawingml/2006/main">
               <a:ext uri="{FF2B5EF4-FFF2-40B4-BE49-F238E27FC236}">
-                <a16:creationId xmlns:a16="http://schemas.microsoft.com/office/drawing/2014/main" id="{F1D44430-4D76-4EB3-A993-93BD848673F2}"/>
+                <a16:creationId xmlns:a16="http://schemas.microsoft.com/office/drawing/2014/main" id="{354E7685-6901-48AD-999C-A641A47E975A}"/>
               </a:ext>
             </a:extLst>
           </p:cNvPr>
@@ -13812,7 +13820,7 @@
           <p:cNvPr id="17" name="">
             <a:extLst xmlns:a="http://schemas.openxmlformats.org/drawingml/2006/main">
               <a:ext uri="{FF2B5EF4-FFF2-40B4-BE49-F238E27FC236}">
-                <a16:creationId xmlns:a16="http://schemas.microsoft.com/office/drawing/2014/main" id="{9EC5A657-506B-4C0A-81A4-774A1C55240B}"/>
+                <a16:creationId xmlns:a16="http://schemas.microsoft.com/office/drawing/2014/main" id="{BD7482C4-A2B2-4DC9-9912-304CBB2A9B29}"/>
               </a:ext>
             </a:extLst>
           </p:cNvPr>
@@ -13869,7 +13877,7 @@
           <p:cNvPr id="18" name="">
             <a:extLst xmlns:a="http://schemas.openxmlformats.org/drawingml/2006/main">
               <a:ext uri="{FF2B5EF4-FFF2-40B4-BE49-F238E27FC236}">
-                <a16:creationId xmlns:a16="http://schemas.microsoft.com/office/drawing/2014/main" id="{A2AC6785-13FD-4791-BFA9-C415F53FCC8A}"/>
+                <a16:creationId xmlns:a16="http://schemas.microsoft.com/office/drawing/2014/main" id="{CCE55716-F1CC-42D3-8612-073038824FB2}"/>
               </a:ext>
             </a:extLst>
           </p:cNvPr>
@@ -13903,7 +13911,7 @@
           <p:cNvPr id="19" name="">
             <a:extLst xmlns:a="http://schemas.openxmlformats.org/drawingml/2006/main">
               <a:ext uri="{FF2B5EF4-FFF2-40B4-BE49-F238E27FC236}">
-                <a16:creationId xmlns:a16="http://schemas.microsoft.com/office/drawing/2014/main" id="{B6ADA5D0-AD45-4D50-A00E-8997916210D0}"/>
+                <a16:creationId xmlns:a16="http://schemas.microsoft.com/office/drawing/2014/main" id="{A170655C-A8F9-4959-8962-61D8264E3315}"/>
               </a:ext>
             </a:extLst>
           </p:cNvPr>
@@ -13935,7 +13943,7 @@
           <p:cNvPr id="20" name="">
             <a:extLst xmlns:a="http://schemas.openxmlformats.org/drawingml/2006/main">
               <a:ext uri="{FF2B5EF4-FFF2-40B4-BE49-F238E27FC236}">
-                <a16:creationId xmlns:a16="http://schemas.microsoft.com/office/drawing/2014/main" id="{F63E5EA7-4E10-4D10-B352-E3ED8D3139B1}"/>
+                <a16:creationId xmlns:a16="http://schemas.microsoft.com/office/drawing/2014/main" id="{F5493D5F-79D8-4AC4-9223-4E5357F65D13}"/>
               </a:ext>
             </a:extLst>
           </p:cNvPr>
@@ -13992,7 +14000,7 @@
           <p:cNvPr id="21" name="">
             <a:extLst xmlns:a="http://schemas.openxmlformats.org/drawingml/2006/main">
               <a:ext uri="{FF2B5EF4-FFF2-40B4-BE49-F238E27FC236}">
-                <a16:creationId xmlns:a16="http://schemas.microsoft.com/office/drawing/2014/main" id="{C4E3401A-9AC2-431A-A824-DB64C1C896A1}"/>
+                <a16:creationId xmlns:a16="http://schemas.microsoft.com/office/drawing/2014/main" id="{7F75FAEF-DAF0-44BB-ACA5-B725C6A8C62D}"/>
               </a:ext>
             </a:extLst>
           </p:cNvPr>
@@ -14047,7 +14055,7 @@
     </p:spTree>
     <p:extLst>
       <p:ext uri="{BB962C8B-B14F-4D97-AF65-F5344CB8AC3E}">
-        <p14:creationId xmlns:p14="http://schemas.microsoft.com/office/powerpoint/2010/main" val="1689978213"/>
+        <p14:creationId xmlns:p14="http://schemas.microsoft.com/office/powerpoint/2010/main" val="879006515"/>
       </p:ext>
     </p:extLst>
   </p:cSld>
